--- a/figure/cp4/fig4-5_sae_module.pptx
+++ b/figure/cp4/fig4-5_sae_module.pptx
@@ -856,13 +856,6 @@
 <file path=ppt/slides/slide1.xml><?xml version="1.0" encoding="utf-8"?>
 <p:sld xmlns:a="http://schemas.openxmlformats.org/drawingml/2006/main" xmlns:p="http://schemas.openxmlformats.org/presentationml/2006/main">
   <p:cSld name="Slide 1">
-    <p:bg>
-      <p:bgPr>
-        <a:solidFill>
-          <a:srgbClr val="FFFFFF"/>
-        </a:solidFill>
-      </p:bgPr>
-    </p:bg>
     <p:spTree>
       <p:nvGrpSpPr>
         <p:cNvPr id="1" name=""/>
@@ -879,14 +872,14 @@
       </p:grpSpPr>
       <p:sp>
         <p:nvSpPr>
-          <p:cNvPr id="2" name="Text 1"/>
-          <p:cNvSpPr/>
-          <p:nvPr/>
-        </p:nvSpPr>
-        <p:spPr>
-          <a:xfrm>
-            <a:off x="1396603" y="2524125"/>
-            <a:ext cx="201748" cy="95250"/>
+          <p:cNvPr id="2" name="Text 0"/>
+          <p:cNvSpPr/>
+          <p:nvPr/>
+        </p:nvSpPr>
+        <p:spPr>
+          <a:xfrm rot="0" flipH="0" flipV="0">
+            <a:off x="0" y="2480310"/>
+            <a:ext cx="365760" cy="182880"/>
           </a:xfrm>
           <a:prstGeom prst="rect">
             <a:avLst/>
@@ -895,187 +888,111 @@
           <a:ln/>
         </p:spPr>
         <p:txBody>
-          <a:bodyPr wrap="square" lIns="0" tIns="0" rIns="0" bIns="0" rtlCol="0" anchor="t"/>
+          <a:bodyPr wrap="square" rtlCol="0" anchor="ctr"/>
           <a:lstStyle/>
           <a:p>
-            <a:pPr marL="0" indent="0" algn="l">
+            <a:pPr marL="0" indent="0" algn="ctr">
               <a:buNone/>
             </a:pPr>
             <a:r>
-              <a:rPr lang="en-US" sz="700" i="1" dirty="0">
+              <a:rPr lang="en-US" sz="900" dirty="0">
                 <a:solidFill>
-                  <a:srgbClr val="666666"/>
+                  <a:srgbClr val="999999"/>
                 </a:solidFill>
-                <a:latin typeface="Arial" pitchFamily="34" charset="0"/>
-                <a:ea typeface="Arial" pitchFamily="34" charset="-122"/>
-                <a:cs typeface="Arial" pitchFamily="34" charset="-120"/>
+                <a:latin typeface="Times New Roman" pitchFamily="34" charset="0"/>
+                <a:ea typeface="Times New Roman" pitchFamily="34" charset="-122"/>
+                <a:cs typeface="Times New Roman" pitchFamily="34" charset="-120"/>
               </a:rPr>
               <a:t>Input</a:t>
             </a:r>
-            <a:endParaRPr lang="en-US" sz="700" dirty="0"/>
-          </a:p>
-        </p:txBody>
-      </p:sp>
-      <p:sp>
-        <p:nvSpPr>
-          <p:cNvPr id="3" name="Text 2"/>
-          <p:cNvSpPr/>
-          <p:nvPr/>
-        </p:nvSpPr>
-        <p:spPr>
-          <a:xfrm>
-            <a:off x="1632496" y="2559100"/>
-            <a:ext cx="126950" cy="25301"/>
-          </a:xfrm>
-          <a:prstGeom prst="rect">
-            <a:avLst/>
-          </a:prstGeom>
-          <a:solidFill>
-            <a:srgbClr val="333333"/>
-          </a:solidFill>
-          <a:ln/>
-        </p:spPr>
-        <p:txBody>
-          <a:bodyPr wrap="square" rtlCol="0" anchor="ctr"/>
-          <a:lstStyle/>
-          <a:p>
-            <a:pPr marL="0" indent="0">
-              <a:buNone/>
-            </a:pPr>
-            <a:endParaRPr lang="en-US" dirty="0"/>
-          </a:p>
-        </p:txBody>
-      </p:sp>
-      <p:sp>
-        <p:nvSpPr>
-          <p:cNvPr id="4" name="Text 3"/>
-          <p:cNvSpPr/>
-          <p:nvPr/>
-        </p:nvSpPr>
-        <p:spPr>
-          <a:xfrm>
-            <a:off x="1928813" y="2262188"/>
-            <a:ext cx="442615" cy="130076"/>
+            <a:endParaRPr lang="en-US" sz="900" dirty="0"/>
+          </a:p>
+        </p:txBody>
+      </p:sp>
+      <p:sp>
+        <p:nvSpPr>
+          <p:cNvPr id="3" name="Shape 1"/>
+          <p:cNvSpPr/>
+          <p:nvPr/>
+        </p:nvSpPr>
+        <p:spPr>
+          <a:xfrm rot="0" flipH="0" flipV="0">
+            <a:off x="283462" y="2569972"/>
+            <a:ext cx="320039" cy="888"/>
+          </a:xfrm>
+          <a:prstGeom prst="line">
+            <a:avLst/>
+          </a:prstGeom>
+          <a:noFill/>
+          <a:ln w="8890">
+            <a:solidFill>
+              <a:srgbClr val="666666"/>
+            </a:solidFill>
+            <a:prstDash val="solid"/>
+            <a:tailEnd type="triangle"/>
+          </a:ln>
+        </p:spPr>
+        <p:txBody>
+          <a:bodyPr/>
+          <a:p>
+            <a:pPr/>
+            <a:endParaRPr/>
+          </a:p>
+        </p:txBody>
+      </p:sp>
+      <p:sp>
+        <p:nvSpPr>
+          <p:cNvPr id="4" name="Shape 2"/>
+          <p:cNvSpPr/>
+          <p:nvPr/>
+        </p:nvSpPr>
+        <p:spPr>
+          <a:xfrm>
+            <a:off x="603504" y="2361438"/>
+            <a:ext cx="1005840" cy="420624"/>
           </a:xfrm>
           <a:prstGeom prst="roundRect">
             <a:avLst>
-              <a:gd name="adj" fmla="val 78108"/>
+              <a:gd name="adj" fmla="val 8696"/>
             </a:avLst>
           </a:prstGeom>
           <a:solidFill>
-            <a:srgbClr val="F5F5F5"/>
-          </a:solidFill>
-          <a:ln w="9525">
-            <a:solidFill>
-              <a:srgbClr val="BDBDBD"/>
-            </a:solidFill>
-          </a:ln>
+            <a:srgbClr val="DDEAF6"/>
+          </a:solidFill>
+          <a:ln w="10160">
+            <a:solidFill>
+              <a:srgbClr val="5B9BD5"/>
+            </a:solidFill>
+            <a:prstDash val="solid"/>
+          </a:ln>
+        </p:spPr>
+        <p:txBody>
+          <a:bodyPr/>
+          <a:p>
+            <a:pPr/>
+            <a:endParaRPr/>
+          </a:p>
+        </p:txBody>
+      </p:sp>
+      <p:sp>
+        <p:nvSpPr>
+          <p:cNvPr id="5" name="Text 3"/>
+          <p:cNvSpPr/>
+          <p:nvPr/>
+        </p:nvSpPr>
+        <p:spPr>
+          <a:xfrm>
+            <a:off x="603504" y="2361438"/>
+            <a:ext cx="1005840" cy="420624"/>
+          </a:xfrm>
+          <a:prstGeom prst="rect">
+            <a:avLst/>
+          </a:prstGeom>
+          <a:noFill/>
+          <a:ln/>
         </p:spPr>
         <p:txBody>
           <a:bodyPr wrap="square" rtlCol="0" anchor="ctr"/>
-          <a:lstStyle/>
-          <a:p>
-            <a:pPr marL="0" indent="0">
-              <a:buNone/>
-            </a:pPr>
-            <a:endParaRPr lang="en-US" dirty="0"/>
-          </a:p>
-        </p:txBody>
-      </p:sp>
-      <p:sp>
-        <p:nvSpPr>
-          <p:cNvPr id="5" name="Text 4"/>
-          <p:cNvSpPr/>
-          <p:nvPr/>
-        </p:nvSpPr>
-        <p:spPr>
-          <a:xfrm>
-            <a:off x="2014538" y="2284363"/>
-            <a:ext cx="276588" cy="85725"/>
-          </a:xfrm>
-          <a:prstGeom prst="rect">
-            <a:avLst/>
-          </a:prstGeom>
-          <a:noFill/>
-          <a:ln/>
-        </p:spPr>
-        <p:txBody>
-          <a:bodyPr wrap="square" lIns="0" tIns="0" rIns="0" bIns="0" rtlCol="0" anchor="t"/>
-          <a:lstStyle/>
-          <a:p>
-            <a:pPr marL="0" indent="0" algn="l">
-              <a:buNone/>
-            </a:pPr>
-            <a:r>
-              <a:rPr lang="en-US" sz="600" b="1" dirty="0">
-                <a:solidFill>
-                  <a:srgbClr val="616161"/>
-                </a:solidFill>
-                <a:latin typeface="Arial" pitchFamily="34" charset="0"/>
-                <a:ea typeface="Arial" pitchFamily="34" charset="-122"/>
-                <a:cs typeface="Arial" pitchFamily="34" charset="-120"/>
-              </a:rPr>
-              <a:t>Stage 1</a:t>
-            </a:r>
-            <a:endParaRPr lang="en-US" sz="600" dirty="0"/>
-          </a:p>
-        </p:txBody>
-      </p:sp>
-      <p:sp>
-        <p:nvSpPr>
-          <p:cNvPr id="6" name="Text 5"/>
-          <p:cNvSpPr/>
-          <p:nvPr/>
-        </p:nvSpPr>
-        <p:spPr>
-          <a:xfrm>
-            <a:off x="1759446" y="2430363"/>
-            <a:ext cx="781348" cy="450800"/>
-          </a:xfrm>
-          <a:prstGeom prst="roundRect">
-            <a:avLst>
-              <a:gd name="adj" fmla="val 11269"/>
-            </a:avLst>
-          </a:prstGeom>
-          <a:solidFill>
-            <a:srgbClr val="D6E4F0"/>
-          </a:solidFill>
-          <a:ln w="9525">
-            <a:solidFill>
-              <a:srgbClr val="B0C4DE"/>
-            </a:solidFill>
-          </a:ln>
-        </p:spPr>
-        <p:txBody>
-          <a:bodyPr wrap="square" rtlCol="0" anchor="ctr"/>
-          <a:lstStyle/>
-          <a:p>
-            <a:pPr marL="0" indent="0">
-              <a:buNone/>
-            </a:pPr>
-            <a:endParaRPr lang="en-US" dirty="0"/>
-          </a:p>
-        </p:txBody>
-      </p:sp>
-      <p:sp>
-        <p:nvSpPr>
-          <p:cNvPr id="7" name="Text 6"/>
-          <p:cNvSpPr/>
-          <p:nvPr/>
-        </p:nvSpPr>
-        <p:spPr>
-          <a:xfrm>
-            <a:off x="1864879" y="2516088"/>
-            <a:ext cx="570482" cy="133350"/>
-          </a:xfrm>
-          <a:prstGeom prst="rect">
-            <a:avLst/>
-          </a:prstGeom>
-          <a:noFill/>
-          <a:ln/>
-        </p:spPr>
-        <p:txBody>
-          <a:bodyPr wrap="square" lIns="0" tIns="0" rIns="0" bIns="0" rtlCol="0" anchor="t"/>
           <a:lstStyle/>
           <a:p>
             <a:pPr marL="0" indent="0" algn="ctr">
@@ -1086,41 +1003,16 @@
                 <a:solidFill>
                   <a:srgbClr val="333333"/>
                 </a:solidFill>
-                <a:latin typeface="Arial" pitchFamily="34" charset="0"/>
-                <a:ea typeface="Arial" pitchFamily="34" charset="-122"/>
-                <a:cs typeface="Arial" pitchFamily="34" charset="-120"/>
+                <a:latin typeface="Times New Roman" pitchFamily="34" charset="0"/>
+                <a:ea typeface="Times New Roman" pitchFamily="34" charset="-122"/>
+                <a:cs typeface="Times New Roman" pitchFamily="34" charset="-120"/>
               </a:rPr>
               <a:t>Coordinate</a:t>
             </a:r>
             <a:endParaRPr lang="en-US" sz="900" dirty="0"/>
           </a:p>
-        </p:txBody>
-      </p:sp>
-      <p:sp>
-        <p:nvSpPr>
-          <p:cNvPr id="8" name="Text 7"/>
-          <p:cNvSpPr/>
-          <p:nvPr/>
-        </p:nvSpPr>
-        <p:spPr>
-          <a:xfrm>
-            <a:off x="1919984" y="2662089"/>
-            <a:ext cx="460272" cy="133350"/>
-          </a:xfrm>
-          <a:prstGeom prst="rect">
-            <a:avLst/>
-          </a:prstGeom>
-          <a:noFill/>
-          <a:ln/>
-        </p:spPr>
-        <p:txBody>
-          <a:bodyPr wrap="square" lIns="0" tIns="0" rIns="0" bIns="0" rtlCol="0" anchor="t"/>
-          <a:lstStyle/>
           <a:p>
             <a:pPr marL="0" indent="0" algn="ctr">
-              <a:spcBef>
-                <a:spcPts val="100"/>
-              </a:spcBef>
               <a:buNone/>
             </a:pPr>
             <a:r>
@@ -1128,9 +1020,9 @@
                 <a:solidFill>
                   <a:srgbClr val="333333"/>
                 </a:solidFill>
-                <a:latin typeface="Arial" pitchFamily="34" charset="0"/>
-                <a:ea typeface="Arial" pitchFamily="34" charset="-122"/>
-                <a:cs typeface="Arial" pitchFamily="34" charset="-120"/>
+                <a:latin typeface="Times New Roman" pitchFamily="34" charset="0"/>
+                <a:ea typeface="Times New Roman" pitchFamily="34" charset="-122"/>
+                <a:cs typeface="Times New Roman" pitchFamily="34" charset="-120"/>
               </a:rPr>
               <a:t>Attention</a:t>
             </a:r>
@@ -1140,1579 +1032,1655 @@
       </p:sp>
       <p:sp>
         <p:nvSpPr>
-          <p:cNvPr id="9" name="Text 8"/>
-          <p:cNvSpPr/>
-          <p:nvPr/>
-        </p:nvSpPr>
-        <p:spPr>
-          <a:xfrm>
-            <a:off x="2540794" y="2559100"/>
-            <a:ext cx="76200" cy="25301"/>
+          <p:cNvPr id="6" name="Shape 4"/>
+          <p:cNvSpPr/>
+          <p:nvPr/>
+        </p:nvSpPr>
+        <p:spPr>
+          <a:xfrm>
+            <a:off x="1609344" y="2571750"/>
+            <a:ext cx="128016" cy="914"/>
+          </a:xfrm>
+          <a:prstGeom prst="line">
+            <a:avLst/>
+          </a:prstGeom>
+          <a:noFill/>
+          <a:ln w="8890">
+            <a:solidFill>
+              <a:srgbClr val="666666"/>
+            </a:solidFill>
+            <a:prstDash val="solid"/>
+          </a:ln>
+        </p:spPr>
+        <p:txBody>
+          <a:bodyPr/>
+          <a:p>
+            <a:pPr/>
+            <a:endParaRPr/>
+          </a:p>
+        </p:txBody>
+      </p:sp>
+      <p:sp>
+        <p:nvSpPr>
+          <p:cNvPr id="7" name="Shape 5"/>
+          <p:cNvSpPr/>
+          <p:nvPr/>
+        </p:nvSpPr>
+        <p:spPr>
+          <a:xfrm>
+            <a:off x="1737360" y="2443734"/>
+            <a:ext cx="256032" cy="256032"/>
+          </a:xfrm>
+          <a:prstGeom prst="ellipse">
+            <a:avLst/>
+          </a:prstGeom>
+          <a:solidFill>
+            <a:srgbClr val="FFFFFF"/>
+          </a:solidFill>
+          <a:ln w="10160">
+            <a:solidFill>
+              <a:srgbClr val="999999"/>
+            </a:solidFill>
+            <a:prstDash val="solid"/>
+          </a:ln>
+        </p:spPr>
+        <p:txBody>
+          <a:bodyPr/>
+          <a:p>
+            <a:pPr/>
+            <a:endParaRPr/>
+          </a:p>
+        </p:txBody>
+      </p:sp>
+      <p:sp>
+        <p:nvSpPr>
+          <p:cNvPr id="8" name="Text 6"/>
+          <p:cNvSpPr/>
+          <p:nvPr/>
+        </p:nvSpPr>
+        <p:spPr>
+          <a:xfrm>
+            <a:off x="1737360" y="2443734"/>
+            <a:ext cx="256032" cy="256032"/>
           </a:xfrm>
           <a:prstGeom prst="rect">
             <a:avLst/>
           </a:prstGeom>
-          <a:solidFill>
-            <a:srgbClr val="333333"/>
-          </a:solidFill>
+          <a:noFill/>
           <a:ln/>
         </p:spPr>
         <p:txBody>
           <a:bodyPr wrap="square" rtlCol="0" anchor="ctr"/>
-          <a:lstStyle/>
-          <a:p>
-            <a:pPr marL="0" indent="0">
-              <a:buNone/>
-            </a:pPr>
-            <a:endParaRPr lang="en-US" dirty="0"/>
-          </a:p>
-        </p:txBody>
-      </p:sp>
-      <p:sp>
-        <p:nvSpPr>
-          <p:cNvPr id="10" name="Text 9"/>
-          <p:cNvSpPr/>
-          <p:nvPr/>
-        </p:nvSpPr>
-        <p:spPr>
-          <a:xfrm>
-            <a:off x="2616994" y="2412950"/>
-            <a:ext cx="317450" cy="317450"/>
-          </a:xfrm>
-          <a:prstGeom prst="roundRect">
-            <a:avLst>
-              <a:gd name="adj" fmla="val 288045"/>
-            </a:avLst>
-          </a:prstGeom>
-          <a:solidFill>
-            <a:srgbClr val="FFFFFF"/>
-          </a:solidFill>
-          <a:ln w="19050">
-            <a:solidFill>
-              <a:srgbClr val="333333"/>
-            </a:solidFill>
-          </a:ln>
-        </p:spPr>
-        <p:txBody>
-          <a:bodyPr wrap="square" rtlCol="0" anchor="ctr"/>
-          <a:lstStyle/>
-          <a:p>
-            <a:pPr marL="0" indent="0">
-              <a:buNone/>
-            </a:pPr>
-            <a:endParaRPr lang="en-US" dirty="0"/>
-          </a:p>
-        </p:txBody>
-      </p:sp>
-      <p:sp>
-        <p:nvSpPr>
-          <p:cNvPr id="11" name="Text 10"/>
-          <p:cNvSpPr/>
-          <p:nvPr/>
-        </p:nvSpPr>
-        <p:spPr>
-          <a:xfrm>
-            <a:off x="2731145" y="2485876"/>
-            <a:ext cx="90779" cy="171450"/>
-          </a:xfrm>
-          <a:prstGeom prst="rect">
-            <a:avLst/>
-          </a:prstGeom>
-          <a:noFill/>
-          <a:ln/>
-        </p:spPr>
-        <p:txBody>
-          <a:bodyPr wrap="square" lIns="0" tIns="0" rIns="0" bIns="0" rtlCol="0" anchor="t"/>
-          <a:lstStyle/>
-          <a:p>
-            <a:pPr marL="0" indent="0" algn="l">
-              <a:buNone/>
-            </a:pPr>
-            <a:r>
-              <a:rPr lang="en-US" sz="1200" b="1" dirty="0">
-                <a:solidFill>
-                  <a:srgbClr val="333333"/>
-                </a:solidFill>
-                <a:latin typeface="Arial" pitchFamily="34" charset="0"/>
-                <a:ea typeface="Arial" pitchFamily="34" charset="-122"/>
-                <a:cs typeface="Arial" pitchFamily="34" charset="-120"/>
-              </a:rPr>
-              <a:t>+</a:t>
-            </a:r>
-            <a:endParaRPr lang="en-US" sz="1200" dirty="0"/>
-          </a:p>
-        </p:txBody>
-      </p:sp>
-      <p:sp>
-        <p:nvSpPr>
-          <p:cNvPr id="12" name="Text 11"/>
-          <p:cNvSpPr/>
-          <p:nvPr/>
-        </p:nvSpPr>
-        <p:spPr>
-          <a:xfrm>
-            <a:off x="2934444" y="2559100"/>
-            <a:ext cx="126950" cy="25301"/>
-          </a:xfrm>
-          <a:prstGeom prst="rect">
-            <a:avLst/>
-          </a:prstGeom>
-          <a:solidFill>
-            <a:srgbClr val="333333"/>
-          </a:solidFill>
-          <a:ln/>
-        </p:spPr>
-        <p:txBody>
-          <a:bodyPr wrap="square" rtlCol="0" anchor="ctr"/>
-          <a:lstStyle/>
-          <a:p>
-            <a:pPr marL="0" indent="0">
-              <a:buNone/>
-            </a:pPr>
-            <a:endParaRPr lang="en-US" dirty="0"/>
-          </a:p>
-        </p:txBody>
-      </p:sp>
-      <p:sp>
-        <p:nvSpPr>
-          <p:cNvPr id="13" name="Text 12"/>
-          <p:cNvSpPr/>
-          <p:nvPr/>
-        </p:nvSpPr>
-        <p:spPr>
-          <a:xfrm>
-            <a:off x="3478709" y="2290763"/>
-            <a:ext cx="442615" cy="130076"/>
-          </a:xfrm>
-          <a:prstGeom prst="roundRect">
-            <a:avLst>
-              <a:gd name="adj" fmla="val 78108"/>
-            </a:avLst>
-          </a:prstGeom>
-          <a:solidFill>
-            <a:srgbClr val="F5F5F5"/>
-          </a:solidFill>
-          <a:ln w="9525">
-            <a:solidFill>
-              <a:srgbClr val="BDBDBD"/>
-            </a:solidFill>
-          </a:ln>
-        </p:spPr>
-        <p:txBody>
-          <a:bodyPr wrap="square" rtlCol="0" anchor="ctr"/>
-          <a:lstStyle/>
-          <a:p>
-            <a:pPr marL="0" indent="0">
-              <a:buNone/>
-            </a:pPr>
-            <a:endParaRPr lang="en-US" dirty="0"/>
-          </a:p>
-        </p:txBody>
-      </p:sp>
-      <p:sp>
-        <p:nvSpPr>
-          <p:cNvPr id="14" name="Text 13"/>
-          <p:cNvSpPr/>
-          <p:nvPr/>
-        </p:nvSpPr>
-        <p:spPr>
-          <a:xfrm>
-            <a:off x="3564434" y="2312938"/>
-            <a:ext cx="276588" cy="85725"/>
-          </a:xfrm>
-          <a:prstGeom prst="rect">
-            <a:avLst/>
-          </a:prstGeom>
-          <a:noFill/>
-          <a:ln/>
-        </p:spPr>
-        <p:txBody>
-          <a:bodyPr wrap="square" lIns="0" tIns="0" rIns="0" bIns="0" rtlCol="0" anchor="t"/>
-          <a:lstStyle/>
-          <a:p>
-            <a:pPr marL="0" indent="0" algn="l">
-              <a:buNone/>
-            </a:pPr>
-            <a:r>
-              <a:rPr lang="en-US" sz="600" b="1" dirty="0">
-                <a:solidFill>
-                  <a:srgbClr val="616161"/>
-                </a:solidFill>
-                <a:latin typeface="Arial" pitchFamily="34" charset="0"/>
-                <a:ea typeface="Arial" pitchFamily="34" charset="-122"/>
-                <a:cs typeface="Arial" pitchFamily="34" charset="-120"/>
-              </a:rPr>
-              <a:t>Stage 2</a:t>
-            </a:r>
-            <a:endParaRPr lang="en-US" sz="600" dirty="0"/>
-          </a:p>
-        </p:txBody>
-      </p:sp>
-      <p:sp>
-        <p:nvSpPr>
-          <p:cNvPr id="15" name="Text 14"/>
-          <p:cNvSpPr/>
-          <p:nvPr/>
-        </p:nvSpPr>
-        <p:spPr>
-          <a:xfrm>
-            <a:off x="3061395" y="2458938"/>
-            <a:ext cx="600521" cy="393650"/>
-          </a:xfrm>
-          <a:prstGeom prst="roundRect">
-            <a:avLst>
-              <a:gd name="adj" fmla="val 12905"/>
-            </a:avLst>
-          </a:prstGeom>
-          <a:solidFill>
-            <a:srgbClr val="D6E4F0"/>
-          </a:solidFill>
-          <a:ln w="9525">
-            <a:solidFill>
-              <a:srgbClr val="B0C4DE"/>
-            </a:solidFill>
-          </a:ln>
-        </p:spPr>
-        <p:txBody>
-          <a:bodyPr wrap="square" rtlCol="0" anchor="ctr"/>
-          <a:lstStyle/>
-          <a:p>
-            <a:pPr marL="0" indent="0">
-              <a:buNone/>
-            </a:pPr>
-            <a:endParaRPr lang="en-US" dirty="0"/>
-          </a:p>
-        </p:txBody>
-      </p:sp>
-      <p:sp>
-        <p:nvSpPr>
-          <p:cNvPr id="16" name="Text 15"/>
-          <p:cNvSpPr/>
-          <p:nvPr/>
-        </p:nvSpPr>
-        <p:spPr>
-          <a:xfrm>
-            <a:off x="3142829" y="2544663"/>
-            <a:ext cx="437653" cy="114300"/>
-          </a:xfrm>
-          <a:prstGeom prst="rect">
-            <a:avLst/>
-          </a:prstGeom>
-          <a:noFill/>
-          <a:ln/>
-        </p:spPr>
-        <p:txBody>
-          <a:bodyPr wrap="square" lIns="0" tIns="0" rIns="0" bIns="0" rtlCol="0" anchor="t"/>
           <a:lstStyle/>
           <a:p>
             <a:pPr marL="0" indent="0" algn="ctr">
               <a:buNone/>
             </a:pPr>
             <a:r>
-              <a:rPr lang="en-US" sz="800" dirty="0">
+              <a:rPr lang="en-US" sz="900" b="1" dirty="0">
                 <a:solidFill>
                   <a:srgbClr val="333333"/>
                 </a:solidFill>
-                <a:latin typeface="Arial" pitchFamily="34" charset="0"/>
-                <a:ea typeface="Arial" pitchFamily="34" charset="-122"/>
-                <a:cs typeface="Arial" pitchFamily="34" charset="-120"/>
+                <a:latin typeface="Times New Roman" pitchFamily="34" charset="0"/>
+                <a:ea typeface="Times New Roman" pitchFamily="34" charset="-122"/>
+                <a:cs typeface="Times New Roman" pitchFamily="34" charset="-120"/>
               </a:rPr>
-              <a:t>Conv 3x3</a:t>
+              <a:t>+</a:t>
             </a:r>
-            <a:endParaRPr lang="en-US" sz="800" dirty="0"/>
-          </a:p>
-        </p:txBody>
-      </p:sp>
-      <p:sp>
-        <p:nvSpPr>
-          <p:cNvPr id="17" name="Text 16"/>
-          <p:cNvSpPr/>
-          <p:nvPr/>
-        </p:nvSpPr>
-        <p:spPr>
-          <a:xfrm>
-            <a:off x="3156339" y="2671614"/>
-            <a:ext cx="410632" cy="95250"/>
-          </a:xfrm>
-          <a:prstGeom prst="rect">
-            <a:avLst/>
-          </a:prstGeom>
-          <a:noFill/>
-          <a:ln/>
-        </p:spPr>
-        <p:txBody>
-          <a:bodyPr wrap="square" lIns="0" tIns="0" rIns="0" bIns="0" rtlCol="0" anchor="t"/>
-          <a:lstStyle/>
-          <a:p>
-            <a:pPr marL="0" indent="0" algn="ctr">
-              <a:spcBef>
-                <a:spcPts val="100"/>
-              </a:spcBef>
-              <a:buNone/>
-            </a:pPr>
-            <a:r>
-              <a:rPr lang="en-US" sz="700" dirty="0">
-                <a:solidFill>
-                  <a:srgbClr val="666666"/>
-                </a:solidFill>
-                <a:latin typeface="Arial" pitchFamily="34" charset="0"/>
-                <a:ea typeface="Arial" pitchFamily="34" charset="-122"/>
-                <a:cs typeface="Arial" pitchFamily="34" charset="-120"/>
-              </a:rPr>
-              <a:t>BN+ReLU</a:t>
-            </a:r>
-            <a:endParaRPr lang="en-US" sz="700" dirty="0"/>
-          </a:p>
-        </p:txBody>
-      </p:sp>
-      <p:sp>
-        <p:nvSpPr>
-          <p:cNvPr id="18" name="Text 17"/>
-          <p:cNvSpPr/>
-          <p:nvPr/>
-        </p:nvSpPr>
-        <p:spPr>
-          <a:xfrm>
-            <a:off x="3661916" y="2643039"/>
-            <a:ext cx="76200" cy="25301"/>
-          </a:xfrm>
-          <a:prstGeom prst="rect">
-            <a:avLst/>
-          </a:prstGeom>
-          <a:solidFill>
-            <a:srgbClr val="333333"/>
-          </a:solidFill>
-          <a:ln/>
-        </p:spPr>
-        <p:txBody>
-          <a:bodyPr wrap="square" rtlCol="0" anchor="ctr"/>
-          <a:lstStyle/>
-          <a:p>
-            <a:pPr marL="0" indent="0">
-              <a:buNone/>
-            </a:pPr>
-            <a:endParaRPr lang="en-US" dirty="0"/>
-          </a:p>
-        </p:txBody>
-      </p:sp>
-      <p:sp>
-        <p:nvSpPr>
-          <p:cNvPr id="19" name="Text 18"/>
-          <p:cNvSpPr/>
-          <p:nvPr/>
-        </p:nvSpPr>
-        <p:spPr>
-          <a:xfrm>
-            <a:off x="3738116" y="2458938"/>
-            <a:ext cx="600521" cy="393650"/>
+            <a:endParaRPr lang="en-US" sz="900" dirty="0"/>
+          </a:p>
+        </p:txBody>
+      </p:sp>
+      <p:sp>
+        <p:nvSpPr>
+          <p:cNvPr id="9" name="Shape 7"/>
+          <p:cNvSpPr/>
+          <p:nvPr/>
+        </p:nvSpPr>
+        <p:spPr>
+          <a:xfrm>
+            <a:off x="475488" y="2571750"/>
+            <a:ext cx="914" cy="448056"/>
+          </a:xfrm>
+          <a:prstGeom prst="line">
+            <a:avLst/>
+          </a:prstGeom>
+          <a:noFill/>
+          <a:ln w="8890">
+            <a:solidFill>
+              <a:srgbClr val="666666"/>
+            </a:solidFill>
+            <a:prstDash val="solid"/>
+          </a:ln>
+        </p:spPr>
+        <p:txBody>
+          <a:bodyPr/>
+          <a:p>
+            <a:pPr/>
+            <a:endParaRPr/>
+          </a:p>
+        </p:txBody>
+      </p:sp>
+      <p:sp>
+        <p:nvSpPr>
+          <p:cNvPr id="10" name="Shape 8"/>
+          <p:cNvSpPr/>
+          <p:nvPr/>
+        </p:nvSpPr>
+        <p:spPr>
+          <a:xfrm>
+            <a:off x="475488" y="3019806"/>
+            <a:ext cx="1389888" cy="914"/>
+          </a:xfrm>
+          <a:prstGeom prst="line">
+            <a:avLst/>
+          </a:prstGeom>
+          <a:noFill/>
+          <a:ln w="8890">
+            <a:solidFill>
+              <a:srgbClr val="666666"/>
+            </a:solidFill>
+            <a:prstDash val="solid"/>
+          </a:ln>
+        </p:spPr>
+        <p:txBody>
+          <a:bodyPr/>
+          <a:p>
+            <a:pPr/>
+            <a:endParaRPr/>
+          </a:p>
+        </p:txBody>
+      </p:sp>
+      <p:sp>
+        <p:nvSpPr>
+          <p:cNvPr id="11" name="Shape 9"/>
+          <p:cNvSpPr/>
+          <p:nvPr/>
+        </p:nvSpPr>
+        <p:spPr>
+          <a:xfrm flipV="1">
+            <a:off x="1865376" y="2699766"/>
+            <a:ext cx="914" cy="320040"/>
+          </a:xfrm>
+          <a:prstGeom prst="line">
+            <a:avLst/>
+          </a:prstGeom>
+          <a:noFill/>
+          <a:ln w="8890">
+            <a:solidFill>
+              <a:srgbClr val="666666"/>
+            </a:solidFill>
+            <a:prstDash val="solid"/>
+            <a:tailEnd type="triangle"/>
+          </a:ln>
+        </p:spPr>
+        <p:txBody>
+          <a:bodyPr/>
+          <a:p>
+            <a:pPr/>
+            <a:endParaRPr/>
+          </a:p>
+        </p:txBody>
+      </p:sp>
+      <p:sp>
+        <p:nvSpPr>
+          <p:cNvPr id="12" name="Shape 10"/>
+          <p:cNvSpPr/>
+          <p:nvPr/>
+        </p:nvSpPr>
+        <p:spPr>
+          <a:xfrm rot="0" flipH="0" flipV="1">
+            <a:off x="1993392" y="2570861"/>
+            <a:ext cx="758952" cy="888"/>
+          </a:xfrm>
+          <a:prstGeom prst="line">
+            <a:avLst/>
+          </a:prstGeom>
+          <a:noFill/>
+          <a:ln w="8890">
+            <a:solidFill>
+              <a:srgbClr val="666666"/>
+            </a:solidFill>
+            <a:prstDash val="solid"/>
+            <a:tailEnd type="triangle"/>
+          </a:ln>
+        </p:spPr>
+        <p:txBody>
+          <a:bodyPr/>
+          <a:p>
+            <a:pPr/>
+            <a:endParaRPr/>
+          </a:p>
+        </p:txBody>
+      </p:sp>
+      <p:sp>
+        <p:nvSpPr>
+          <p:cNvPr id="13" name="Shape 14"/>
+          <p:cNvSpPr/>
+          <p:nvPr/>
+        </p:nvSpPr>
+        <p:spPr>
+          <a:xfrm rot="0" flipH="0" flipV="0">
+            <a:off x="2752344" y="2366010"/>
+            <a:ext cx="777240" cy="420623"/>
           </a:xfrm>
           <a:prstGeom prst="roundRect">
             <a:avLst>
-              <a:gd name="adj" fmla="val 12905"/>
+              <a:gd name="adj" fmla="val 8696"/>
             </a:avLst>
           </a:prstGeom>
           <a:solidFill>
-            <a:srgbClr val="D6E4F0"/>
-          </a:solidFill>
-          <a:ln w="9525">
-            <a:solidFill>
-              <a:srgbClr val="B0C4DE"/>
-            </a:solidFill>
-          </a:ln>
+            <a:srgbClr val="DDEAF6"/>
+          </a:solidFill>
+          <a:ln w="10160">
+            <a:solidFill>
+              <a:srgbClr val="5B9BD5"/>
+            </a:solidFill>
+            <a:prstDash val="solid"/>
+          </a:ln>
+        </p:spPr>
+        <p:txBody>
+          <a:bodyPr/>
+          <a:p>
+            <a:pPr/>
+            <a:endParaRPr/>
+          </a:p>
+        </p:txBody>
+      </p:sp>
+      <p:sp>
+        <p:nvSpPr>
+          <p:cNvPr id="14" name="Text 15"/>
+          <p:cNvSpPr/>
+          <p:nvPr/>
+        </p:nvSpPr>
+        <p:spPr>
+          <a:xfrm rot="0" flipH="0" flipV="0">
+            <a:off x="2752344" y="2366010"/>
+            <a:ext cx="777240" cy="420623"/>
+          </a:xfrm>
+          <a:prstGeom prst="rect">
+            <a:avLst/>
+          </a:prstGeom>
+          <a:noFill/>
+          <a:ln/>
         </p:spPr>
         <p:txBody>
           <a:bodyPr wrap="square" rtlCol="0" anchor="ctr"/>
-          <a:lstStyle/>
-          <a:p>
-            <a:pPr marL="0" indent="0">
-              <a:buNone/>
-            </a:pPr>
-            <a:endParaRPr lang="en-US" dirty="0"/>
-          </a:p>
-        </p:txBody>
-      </p:sp>
-      <p:sp>
-        <p:nvSpPr>
-          <p:cNvPr id="20" name="Text 19"/>
-          <p:cNvSpPr/>
-          <p:nvPr/>
-        </p:nvSpPr>
-        <p:spPr>
-          <a:xfrm>
-            <a:off x="3819550" y="2544663"/>
-            <a:ext cx="437653" cy="114300"/>
-          </a:xfrm>
-          <a:prstGeom prst="rect">
-            <a:avLst/>
-          </a:prstGeom>
-          <a:noFill/>
-          <a:ln/>
-        </p:spPr>
-        <p:txBody>
-          <a:bodyPr wrap="square" lIns="0" tIns="0" rIns="0" bIns="0" rtlCol="0" anchor="t"/>
           <a:lstStyle/>
           <a:p>
             <a:pPr marL="0" indent="0" algn="ctr">
               <a:buNone/>
             </a:pPr>
             <a:r>
-              <a:rPr lang="en-US" sz="800" dirty="0">
+              <a:rPr lang="en-US" sz="900" dirty="0">
                 <a:solidFill>
                   <a:srgbClr val="333333"/>
                 </a:solidFill>
-                <a:latin typeface="Arial" pitchFamily="34" charset="0"/>
-                <a:ea typeface="Arial" pitchFamily="34" charset="-122"/>
-                <a:cs typeface="Arial" pitchFamily="34" charset="-120"/>
+                <a:latin typeface="Times New Roman" pitchFamily="34" charset="0"/>
+                <a:ea typeface="Times New Roman" pitchFamily="34" charset="-122"/>
+                <a:cs typeface="Times New Roman" pitchFamily="34" charset="-120"/>
               </a:rPr>
-              <a:t>Conv 3x3</a:t>
+              <a:t>Conv 3×3</a:t>
             </a:r>
-            <a:endParaRPr lang="en-US" sz="800" dirty="0"/>
-          </a:p>
-        </p:txBody>
-      </p:sp>
-      <p:sp>
-        <p:nvSpPr>
-          <p:cNvPr id="21" name="Text 20"/>
-          <p:cNvSpPr/>
-          <p:nvPr/>
-        </p:nvSpPr>
-        <p:spPr>
-          <a:xfrm>
-            <a:off x="3833061" y="2671614"/>
-            <a:ext cx="410632" cy="95250"/>
-          </a:xfrm>
-          <a:prstGeom prst="rect">
-            <a:avLst/>
-          </a:prstGeom>
-          <a:noFill/>
-          <a:ln/>
-        </p:spPr>
-        <p:txBody>
-          <a:bodyPr wrap="square" lIns="0" tIns="0" rIns="0" bIns="0" rtlCol="0" anchor="t"/>
-          <a:lstStyle/>
-          <a:p>
-            <a:pPr marL="0" indent="0" algn="ctr">
-              <a:spcBef>
-                <a:spcPts val="100"/>
-              </a:spcBef>
-              <a:buNone/>
-            </a:pPr>
-            <a:r>
-              <a:rPr lang="en-US" sz="700" dirty="0">
-                <a:solidFill>
-                  <a:srgbClr val="666666"/>
-                </a:solidFill>
-                <a:latin typeface="Arial" pitchFamily="34" charset="0"/>
-                <a:ea typeface="Arial" pitchFamily="34" charset="-122"/>
-                <a:cs typeface="Arial" pitchFamily="34" charset="-120"/>
-              </a:rPr>
-              <a:t>BN+ReLU</a:t>
-            </a:r>
-            <a:endParaRPr lang="en-US" sz="700" dirty="0"/>
-          </a:p>
-        </p:txBody>
-      </p:sp>
-      <p:sp>
-        <p:nvSpPr>
-          <p:cNvPr id="22" name="Text 21"/>
-          <p:cNvSpPr/>
-          <p:nvPr/>
-        </p:nvSpPr>
-        <p:spPr>
-          <a:xfrm>
-            <a:off x="4338638" y="2559100"/>
-            <a:ext cx="76200" cy="25301"/>
-          </a:xfrm>
-          <a:prstGeom prst="rect">
-            <a:avLst/>
-          </a:prstGeom>
-          <a:solidFill>
-            <a:srgbClr val="333333"/>
-          </a:solidFill>
-          <a:ln/>
-        </p:spPr>
-        <p:txBody>
-          <a:bodyPr wrap="square" rtlCol="0" anchor="ctr"/>
-          <a:lstStyle/>
-          <a:p>
-            <a:pPr marL="0" indent="0">
-              <a:buNone/>
-            </a:pPr>
-            <a:endParaRPr lang="en-US" dirty="0"/>
-          </a:p>
-        </p:txBody>
-      </p:sp>
-      <p:sp>
-        <p:nvSpPr>
-          <p:cNvPr id="23" name="Text 22"/>
-          <p:cNvSpPr/>
-          <p:nvPr/>
-        </p:nvSpPr>
-        <p:spPr>
-          <a:xfrm>
-            <a:off x="4414838" y="2412950"/>
-            <a:ext cx="317450" cy="317450"/>
-          </a:xfrm>
-          <a:prstGeom prst="roundRect">
-            <a:avLst>
-              <a:gd name="adj" fmla="val 288045"/>
-            </a:avLst>
-          </a:prstGeom>
-          <a:solidFill>
-            <a:srgbClr val="FFFFFF"/>
-          </a:solidFill>
-          <a:ln w="19050">
-            <a:solidFill>
-              <a:srgbClr val="333333"/>
-            </a:solidFill>
-          </a:ln>
-        </p:spPr>
-        <p:txBody>
-          <a:bodyPr wrap="square" rtlCol="0" anchor="ctr"/>
-          <a:lstStyle/>
-          <a:p>
-            <a:pPr marL="0" indent="0">
-              <a:buNone/>
-            </a:pPr>
-            <a:endParaRPr lang="en-US" dirty="0"/>
-          </a:p>
-        </p:txBody>
-      </p:sp>
-      <p:sp>
-        <p:nvSpPr>
-          <p:cNvPr id="24" name="Text 23"/>
-          <p:cNvSpPr/>
-          <p:nvPr/>
-        </p:nvSpPr>
-        <p:spPr>
-          <a:xfrm>
-            <a:off x="4528989" y="2485876"/>
-            <a:ext cx="90779" cy="171450"/>
-          </a:xfrm>
-          <a:prstGeom prst="rect">
-            <a:avLst/>
-          </a:prstGeom>
-          <a:noFill/>
-          <a:ln/>
-        </p:spPr>
-        <p:txBody>
-          <a:bodyPr wrap="square" lIns="0" tIns="0" rIns="0" bIns="0" rtlCol="0" anchor="t"/>
-          <a:lstStyle/>
-          <a:p>
-            <a:pPr marL="0" indent="0" algn="l">
-              <a:buNone/>
-            </a:pPr>
-            <a:r>
-              <a:rPr lang="en-US" sz="1200" b="1" dirty="0">
-                <a:solidFill>
-                  <a:srgbClr val="333333"/>
-                </a:solidFill>
-                <a:latin typeface="Arial" pitchFamily="34" charset="0"/>
-                <a:ea typeface="Arial" pitchFamily="34" charset="-122"/>
-                <a:cs typeface="Arial" pitchFamily="34" charset="-120"/>
-              </a:rPr>
-              <a:t>+</a:t>
-            </a:r>
-            <a:endParaRPr lang="en-US" sz="1200" dirty="0"/>
-          </a:p>
-        </p:txBody>
-      </p:sp>
-      <p:sp>
-        <p:nvSpPr>
-          <p:cNvPr id="25" name="Text 24"/>
-          <p:cNvSpPr/>
-          <p:nvPr/>
-        </p:nvSpPr>
-        <p:spPr>
-          <a:xfrm>
-            <a:off x="4732288" y="2559100"/>
-            <a:ext cx="126950" cy="25301"/>
-          </a:xfrm>
-          <a:prstGeom prst="rect">
-            <a:avLst/>
-          </a:prstGeom>
-          <a:solidFill>
-            <a:srgbClr val="333333"/>
-          </a:solidFill>
-          <a:ln/>
-        </p:spPr>
-        <p:txBody>
-          <a:bodyPr wrap="square" rtlCol="0" anchor="ctr"/>
-          <a:lstStyle/>
-          <a:p>
-            <a:pPr marL="0" indent="0">
-              <a:buNone/>
-            </a:pPr>
-            <a:endParaRPr lang="en-US" dirty="0"/>
-          </a:p>
-        </p:txBody>
-      </p:sp>
-      <p:sp>
-        <p:nvSpPr>
-          <p:cNvPr id="26" name="Text 25"/>
-          <p:cNvSpPr/>
-          <p:nvPr/>
-        </p:nvSpPr>
-        <p:spPr>
-          <a:xfrm>
-            <a:off x="5669161" y="2068711"/>
-            <a:ext cx="442615" cy="130076"/>
-          </a:xfrm>
-          <a:prstGeom prst="roundRect">
-            <a:avLst>
-              <a:gd name="adj" fmla="val 78108"/>
-            </a:avLst>
-          </a:prstGeom>
-          <a:solidFill>
-            <a:srgbClr val="F5F5F5"/>
-          </a:solidFill>
-          <a:ln w="9525">
-            <a:solidFill>
-              <a:srgbClr val="BDBDBD"/>
-            </a:solidFill>
-          </a:ln>
-        </p:spPr>
-        <p:txBody>
-          <a:bodyPr wrap="square" rtlCol="0" anchor="ctr"/>
-          <a:lstStyle/>
-          <a:p>
-            <a:pPr marL="0" indent="0">
-              <a:buNone/>
-            </a:pPr>
-            <a:endParaRPr lang="en-US" dirty="0"/>
-          </a:p>
-        </p:txBody>
-      </p:sp>
-      <p:sp>
-        <p:nvSpPr>
-          <p:cNvPr id="27" name="Text 26"/>
-          <p:cNvSpPr/>
-          <p:nvPr/>
-        </p:nvSpPr>
-        <p:spPr>
-          <a:xfrm>
-            <a:off x="5754886" y="2090886"/>
-            <a:ext cx="276588" cy="85725"/>
-          </a:xfrm>
-          <a:prstGeom prst="rect">
-            <a:avLst/>
-          </a:prstGeom>
-          <a:noFill/>
-          <a:ln/>
-        </p:spPr>
-        <p:txBody>
-          <a:bodyPr wrap="square" lIns="0" tIns="0" rIns="0" bIns="0" rtlCol="0" anchor="t"/>
-          <a:lstStyle/>
-          <a:p>
-            <a:pPr marL="0" indent="0" algn="l">
-              <a:buNone/>
-            </a:pPr>
-            <a:r>
-              <a:rPr lang="en-US" sz="600" b="1" dirty="0">
-                <a:solidFill>
-                  <a:srgbClr val="616161"/>
-                </a:solidFill>
-                <a:latin typeface="Arial" pitchFamily="34" charset="0"/>
-                <a:ea typeface="Arial" pitchFamily="34" charset="-122"/>
-                <a:cs typeface="Arial" pitchFamily="34" charset="-120"/>
-              </a:rPr>
-              <a:t>Stage 3</a:t>
-            </a:r>
-            <a:endParaRPr lang="en-US" sz="600" dirty="0"/>
-          </a:p>
-        </p:txBody>
-      </p:sp>
-      <p:sp>
-        <p:nvSpPr>
-          <p:cNvPr id="28" name="Text 27"/>
-          <p:cNvSpPr/>
-          <p:nvPr/>
-        </p:nvSpPr>
-        <p:spPr>
-          <a:xfrm>
-            <a:off x="4859238" y="2512963"/>
-            <a:ext cx="385911" cy="285750"/>
-          </a:xfrm>
-          <a:prstGeom prst="roundRect">
-            <a:avLst>
-              <a:gd name="adj" fmla="val 17778"/>
-            </a:avLst>
-          </a:prstGeom>
-          <a:solidFill>
-            <a:srgbClr val="D6E4F0"/>
-          </a:solidFill>
-          <a:ln w="9525">
-            <a:solidFill>
-              <a:srgbClr val="B0C4DE"/>
-            </a:solidFill>
-          </a:ln>
-        </p:spPr>
-        <p:txBody>
-          <a:bodyPr wrap="square" rtlCol="0" anchor="ctr"/>
-          <a:lstStyle/>
-          <a:p>
-            <a:pPr marL="0" indent="0">
-              <a:buNone/>
-            </a:pPr>
-            <a:endParaRPr lang="en-US" dirty="0"/>
-          </a:p>
-        </p:txBody>
-      </p:sp>
-      <p:sp>
-        <p:nvSpPr>
-          <p:cNvPr id="29" name="Text 28"/>
-          <p:cNvSpPr/>
-          <p:nvPr/>
-        </p:nvSpPr>
-        <p:spPr>
-          <a:xfrm>
-            <a:off x="4942819" y="2598688"/>
-            <a:ext cx="218751" cy="114300"/>
-          </a:xfrm>
-          <a:prstGeom prst="rect">
-            <a:avLst/>
-          </a:prstGeom>
-          <a:noFill/>
-          <a:ln/>
-        </p:spPr>
-        <p:txBody>
-          <a:bodyPr wrap="square" lIns="0" tIns="0" rIns="0" bIns="0" rtlCol="0" anchor="t"/>
-          <a:lstStyle/>
+            <a:endParaRPr lang="en-US" sz="900" dirty="0"/>
+          </a:p>
           <a:p>
             <a:pPr marL="0" indent="0" algn="ctr">
               <a:buNone/>
             </a:pPr>
             <a:r>
-              <a:rPr lang="en-US" sz="800" dirty="0">
+              <a:rPr lang="en-US" sz="900" dirty="0">
                 <a:solidFill>
                   <a:srgbClr val="333333"/>
                 </a:solidFill>
-                <a:latin typeface="Arial" pitchFamily="34" charset="0"/>
-                <a:ea typeface="Arial" pitchFamily="34" charset="-122"/>
-                <a:cs typeface="Arial" pitchFamily="34" charset="-120"/>
+                <a:latin typeface="Times New Roman" pitchFamily="34" charset="0"/>
+                <a:ea typeface="Times New Roman" pitchFamily="34" charset="-122"/>
+                <a:cs typeface="Times New Roman" pitchFamily="34" charset="-120"/>
               </a:rPr>
-              <a:t>GAP</a:t>
+              <a:t>BN+ReLU</a:t>
             </a:r>
-            <a:endParaRPr lang="en-US" sz="800" dirty="0"/>
-          </a:p>
-        </p:txBody>
-      </p:sp>
-      <p:sp>
-        <p:nvSpPr>
-          <p:cNvPr id="30" name="Text 29"/>
-          <p:cNvSpPr/>
-          <p:nvPr/>
-        </p:nvSpPr>
-        <p:spPr>
-          <a:xfrm>
-            <a:off x="5245150" y="2643188"/>
-            <a:ext cx="63401" cy="25301"/>
+            <a:endParaRPr lang="en-US" sz="900" dirty="0"/>
+          </a:p>
+        </p:txBody>
+      </p:sp>
+      <p:sp>
+        <p:nvSpPr>
+          <p:cNvPr id="15" name="Shape 16"/>
+          <p:cNvSpPr/>
+          <p:nvPr/>
+        </p:nvSpPr>
+        <p:spPr>
+          <a:xfrm rot="0" flipH="0" flipV="0">
+            <a:off x="3529584" y="2571750"/>
+            <a:ext cx="402335" cy="4571"/>
+          </a:xfrm>
+          <a:prstGeom prst="line">
+            <a:avLst/>
+          </a:prstGeom>
+          <a:noFill/>
+          <a:ln w="8890">
+            <a:solidFill>
+              <a:srgbClr val="666666"/>
+            </a:solidFill>
+            <a:prstDash val="solid"/>
+          </a:ln>
+        </p:spPr>
+        <p:txBody>
+          <a:bodyPr/>
+          <a:p>
+            <a:pPr/>
+            <a:endParaRPr/>
+          </a:p>
+        </p:txBody>
+      </p:sp>
+      <p:sp>
+        <p:nvSpPr>
+          <p:cNvPr id="16" name="Shape 17"/>
+          <p:cNvSpPr/>
+          <p:nvPr/>
+        </p:nvSpPr>
+        <p:spPr>
+          <a:xfrm>
+            <a:off x="3931920" y="2443734"/>
+            <a:ext cx="256032" cy="256032"/>
+          </a:xfrm>
+          <a:prstGeom prst="ellipse">
+            <a:avLst/>
+          </a:prstGeom>
+          <a:solidFill>
+            <a:srgbClr val="FFFFFF"/>
+          </a:solidFill>
+          <a:ln w="10160">
+            <a:solidFill>
+              <a:srgbClr val="999999"/>
+            </a:solidFill>
+            <a:prstDash val="solid"/>
+          </a:ln>
+        </p:spPr>
+        <p:txBody>
+          <a:bodyPr/>
+          <a:p>
+            <a:pPr/>
+            <a:endParaRPr/>
+          </a:p>
+        </p:txBody>
+      </p:sp>
+      <p:sp>
+        <p:nvSpPr>
+          <p:cNvPr id="17" name="Text 18"/>
+          <p:cNvSpPr/>
+          <p:nvPr/>
+        </p:nvSpPr>
+        <p:spPr>
+          <a:xfrm>
+            <a:off x="3931920" y="2443734"/>
+            <a:ext cx="256032" cy="256032"/>
           </a:xfrm>
           <a:prstGeom prst="rect">
             <a:avLst/>
           </a:prstGeom>
-          <a:solidFill>
-            <a:srgbClr val="333333"/>
-          </a:solidFill>
+          <a:noFill/>
           <a:ln/>
         </p:spPr>
         <p:txBody>
           <a:bodyPr wrap="square" rtlCol="0" anchor="ctr"/>
-          <a:lstStyle/>
-          <a:p>
-            <a:pPr marL="0" indent="0">
-              <a:buNone/>
-            </a:pPr>
-            <a:endParaRPr lang="en-US" dirty="0"/>
-          </a:p>
-        </p:txBody>
-      </p:sp>
-      <p:sp>
-        <p:nvSpPr>
-          <p:cNvPr id="31" name="Text 30"/>
-          <p:cNvSpPr/>
-          <p:nvPr/>
-        </p:nvSpPr>
-        <p:spPr>
-          <a:xfrm>
-            <a:off x="5308550" y="2236887"/>
-            <a:ext cx="264319" cy="190500"/>
-          </a:xfrm>
-          <a:prstGeom prst="roundRect">
-            <a:avLst>
-              <a:gd name="adj" fmla="val 26667"/>
-            </a:avLst>
-          </a:prstGeom>
-          <a:solidFill>
-            <a:srgbClr val="D6E4F0"/>
-          </a:solidFill>
-          <a:ln w="9525">
-            <a:solidFill>
-              <a:srgbClr val="B0C4DE"/>
-            </a:solidFill>
-          </a:ln>
-        </p:spPr>
-        <p:txBody>
-          <a:bodyPr wrap="square" rtlCol="0" anchor="ctr"/>
-          <a:lstStyle/>
-          <a:p>
-            <a:pPr marL="0" indent="0">
-              <a:buNone/>
-            </a:pPr>
-            <a:endParaRPr lang="en-US" dirty="0"/>
-          </a:p>
-        </p:txBody>
-      </p:sp>
-      <p:sp>
-        <p:nvSpPr>
-          <p:cNvPr id="32" name="Text 31"/>
-          <p:cNvSpPr/>
-          <p:nvPr/>
-        </p:nvSpPr>
-        <p:spPr>
-          <a:xfrm>
-            <a:off x="5380292" y="2284512"/>
-            <a:ext cx="120837" cy="95250"/>
-          </a:xfrm>
-          <a:prstGeom prst="rect">
-            <a:avLst/>
-          </a:prstGeom>
-          <a:noFill/>
-          <a:ln/>
-        </p:spPr>
-        <p:txBody>
-          <a:bodyPr wrap="square" lIns="0" tIns="0" rIns="0" bIns="0" rtlCol="0" anchor="t"/>
           <a:lstStyle/>
           <a:p>
             <a:pPr marL="0" indent="0" algn="ctr">
               <a:buNone/>
             </a:pPr>
             <a:r>
-              <a:rPr lang="en-US" sz="700" dirty="0">
+              <a:rPr lang="en-US" sz="900" b="1" dirty="0">
                 <a:solidFill>
                   <a:srgbClr val="333333"/>
                 </a:solidFill>
-                <a:latin typeface="Arial" pitchFamily="34" charset="0"/>
-                <a:ea typeface="Arial" pitchFamily="34" charset="-122"/>
-                <a:cs typeface="Arial" pitchFamily="34" charset="-120"/>
+                <a:latin typeface="Times New Roman" pitchFamily="34" charset="0"/>
+                <a:ea typeface="Times New Roman" pitchFamily="34" charset="-122"/>
+                <a:cs typeface="Times New Roman" pitchFamily="34" charset="-120"/>
               </a:rPr>
-              <a:t>FC</a:t>
+              <a:t>+</a:t>
             </a:r>
-            <a:endParaRPr lang="en-US" sz="700" dirty="0"/>
-          </a:p>
-        </p:txBody>
-      </p:sp>
-      <p:sp>
-        <p:nvSpPr>
-          <p:cNvPr id="33" name="Text 32"/>
-          <p:cNvSpPr/>
-          <p:nvPr/>
-        </p:nvSpPr>
-        <p:spPr>
-          <a:xfrm>
-            <a:off x="5308550" y="2452688"/>
-            <a:ext cx="264319" cy="190500"/>
+            <a:endParaRPr lang="en-US" sz="900" dirty="0"/>
+          </a:p>
+        </p:txBody>
+      </p:sp>
+      <p:sp>
+        <p:nvSpPr>
+          <p:cNvPr id="18" name="Shape 19"/>
+          <p:cNvSpPr/>
+          <p:nvPr/>
+        </p:nvSpPr>
+        <p:spPr>
+          <a:xfrm flipV="1">
+            <a:off x="2121408" y="2123694"/>
+            <a:ext cx="914" cy="448056"/>
+          </a:xfrm>
+          <a:prstGeom prst="line">
+            <a:avLst/>
+          </a:prstGeom>
+          <a:noFill/>
+          <a:ln w="8890">
+            <a:solidFill>
+              <a:srgbClr val="666666"/>
+            </a:solidFill>
+            <a:prstDash val="solid"/>
+          </a:ln>
+        </p:spPr>
+        <p:txBody>
+          <a:bodyPr/>
+          <a:p>
+            <a:pPr/>
+            <a:endParaRPr/>
+          </a:p>
+        </p:txBody>
+      </p:sp>
+      <p:sp>
+        <p:nvSpPr>
+          <p:cNvPr id="19" name="Shape 20"/>
+          <p:cNvSpPr/>
+          <p:nvPr/>
+        </p:nvSpPr>
+        <p:spPr>
+          <a:xfrm>
+            <a:off x="2121408" y="2123694"/>
+            <a:ext cx="1938528" cy="914"/>
+          </a:xfrm>
+          <a:prstGeom prst="line">
+            <a:avLst/>
+          </a:prstGeom>
+          <a:noFill/>
+          <a:ln w="8890">
+            <a:solidFill>
+              <a:srgbClr val="666666"/>
+            </a:solidFill>
+            <a:prstDash val="solid"/>
+          </a:ln>
+        </p:spPr>
+        <p:txBody>
+          <a:bodyPr/>
+          <a:p>
+            <a:pPr/>
+            <a:endParaRPr/>
+          </a:p>
+        </p:txBody>
+      </p:sp>
+      <p:sp>
+        <p:nvSpPr>
+          <p:cNvPr id="20" name="Shape 21"/>
+          <p:cNvSpPr/>
+          <p:nvPr/>
+        </p:nvSpPr>
+        <p:spPr>
+          <a:xfrm>
+            <a:off x="4059936" y="2123694"/>
+            <a:ext cx="914" cy="320040"/>
+          </a:xfrm>
+          <a:prstGeom prst="line">
+            <a:avLst/>
+          </a:prstGeom>
+          <a:noFill/>
+          <a:ln w="8890">
+            <a:solidFill>
+              <a:srgbClr val="666666"/>
+            </a:solidFill>
+            <a:prstDash val="solid"/>
+            <a:tailEnd type="triangle"/>
+          </a:ln>
+        </p:spPr>
+        <p:txBody>
+          <a:bodyPr/>
+          <a:p>
+            <a:pPr/>
+            <a:endParaRPr/>
+          </a:p>
+        </p:txBody>
+      </p:sp>
+      <p:sp>
+        <p:nvSpPr>
+          <p:cNvPr id="21" name="Shape 22"/>
+          <p:cNvSpPr/>
+          <p:nvPr/>
+        </p:nvSpPr>
+        <p:spPr>
+          <a:xfrm>
+            <a:off x="4187952" y="2571750"/>
+            <a:ext cx="128016" cy="914"/>
+          </a:xfrm>
+          <a:prstGeom prst="line">
+            <a:avLst/>
+          </a:prstGeom>
+          <a:noFill/>
+          <a:ln w="8890">
+            <a:solidFill>
+              <a:srgbClr val="666666"/>
+            </a:solidFill>
+            <a:prstDash val="solid"/>
+            <a:tailEnd type="triangle"/>
+          </a:ln>
+        </p:spPr>
+        <p:txBody>
+          <a:bodyPr/>
+          <a:p>
+            <a:pPr/>
+            <a:endParaRPr/>
+          </a:p>
+        </p:txBody>
+      </p:sp>
+      <p:sp>
+        <p:nvSpPr>
+          <p:cNvPr id="22" name="Shape 23"/>
+          <p:cNvSpPr/>
+          <p:nvPr/>
+        </p:nvSpPr>
+        <p:spPr>
+          <a:xfrm>
+            <a:off x="4315968" y="2361438"/>
+            <a:ext cx="457200" cy="420624"/>
           </a:xfrm>
           <a:prstGeom prst="roundRect">
             <a:avLst>
-              <a:gd name="adj" fmla="val 26667"/>
+              <a:gd name="adj" fmla="val 8696"/>
             </a:avLst>
           </a:prstGeom>
           <a:solidFill>
-            <a:srgbClr val="D6E4F0"/>
-          </a:solidFill>
-          <a:ln w="9525">
-            <a:solidFill>
-              <a:srgbClr val="B0C4DE"/>
-            </a:solidFill>
-          </a:ln>
+            <a:srgbClr val="DDEAF6"/>
+          </a:solidFill>
+          <a:ln w="10160">
+            <a:solidFill>
+              <a:srgbClr val="5B9BD5"/>
+            </a:solidFill>
+            <a:prstDash val="solid"/>
+          </a:ln>
+        </p:spPr>
+        <p:txBody>
+          <a:bodyPr/>
+          <a:p>
+            <a:pPr/>
+            <a:endParaRPr/>
+          </a:p>
+        </p:txBody>
+      </p:sp>
+      <p:sp>
+        <p:nvSpPr>
+          <p:cNvPr id="23" name="Text 24"/>
+          <p:cNvSpPr/>
+          <p:nvPr/>
+        </p:nvSpPr>
+        <p:spPr>
+          <a:xfrm>
+            <a:off x="4315968" y="2361438"/>
+            <a:ext cx="457200" cy="420624"/>
+          </a:xfrm>
+          <a:prstGeom prst="rect">
+            <a:avLst/>
+          </a:prstGeom>
+          <a:noFill/>
+          <a:ln/>
         </p:spPr>
         <p:txBody>
           <a:bodyPr wrap="square" rtlCol="0" anchor="ctr"/>
-          <a:lstStyle/>
-          <a:p>
-            <a:pPr marL="0" indent="0">
-              <a:buNone/>
-            </a:pPr>
-            <a:endParaRPr lang="en-US" dirty="0"/>
-          </a:p>
-        </p:txBody>
-      </p:sp>
-      <p:sp>
-        <p:nvSpPr>
-          <p:cNvPr id="34" name="Text 33"/>
-          <p:cNvSpPr/>
-          <p:nvPr/>
-        </p:nvSpPr>
-        <p:spPr>
-          <a:xfrm>
-            <a:off x="5380292" y="2500313"/>
-            <a:ext cx="120837" cy="95250"/>
-          </a:xfrm>
-          <a:prstGeom prst="rect">
-            <a:avLst/>
-          </a:prstGeom>
-          <a:noFill/>
-          <a:ln/>
-        </p:spPr>
-        <p:txBody>
-          <a:bodyPr wrap="square" lIns="0" tIns="0" rIns="0" bIns="0" rtlCol="0" anchor="t"/>
           <a:lstStyle/>
           <a:p>
             <a:pPr marL="0" indent="0" algn="ctr">
               <a:buNone/>
             </a:pPr>
             <a:r>
-              <a:rPr lang="en-US" sz="700" dirty="0">
+              <a:rPr lang="en-US" sz="900" dirty="0">
                 <a:solidFill>
                   <a:srgbClr val="333333"/>
                 </a:solidFill>
-                <a:latin typeface="Arial" pitchFamily="34" charset="0"/>
-                <a:ea typeface="Arial" pitchFamily="34" charset="-122"/>
-                <a:cs typeface="Arial" pitchFamily="34" charset="-120"/>
+                <a:latin typeface="Times New Roman" pitchFamily="34" charset="0"/>
+                <a:ea typeface="Times New Roman" pitchFamily="34" charset="-122"/>
+                <a:cs typeface="Times New Roman" pitchFamily="34" charset="-120"/>
               </a:rPr>
-              <a:t>FC</a:t>
+              <a:t>GAP</a:t>
             </a:r>
-            <a:endParaRPr lang="en-US" sz="700" dirty="0"/>
-          </a:p>
-        </p:txBody>
-      </p:sp>
-      <p:sp>
-        <p:nvSpPr>
-          <p:cNvPr id="35" name="Text 34"/>
-          <p:cNvSpPr/>
-          <p:nvPr/>
-        </p:nvSpPr>
-        <p:spPr>
-          <a:xfrm>
-            <a:off x="5308550" y="2668488"/>
-            <a:ext cx="264319" cy="190500"/>
+            <a:endParaRPr lang="en-US" sz="900" dirty="0"/>
+          </a:p>
+        </p:txBody>
+      </p:sp>
+      <p:sp>
+        <p:nvSpPr>
+          <p:cNvPr id="24" name="Shape 25"/>
+          <p:cNvSpPr/>
+          <p:nvPr/>
+        </p:nvSpPr>
+        <p:spPr>
+          <a:xfrm>
+            <a:off x="4773168" y="2571750"/>
+            <a:ext cx="91440" cy="914"/>
+          </a:xfrm>
+          <a:prstGeom prst="line">
+            <a:avLst/>
+          </a:prstGeom>
+          <a:noFill/>
+          <a:ln w="8890">
+            <a:solidFill>
+              <a:srgbClr val="666666"/>
+            </a:solidFill>
+            <a:prstDash val="solid"/>
+          </a:ln>
+        </p:spPr>
+        <p:txBody>
+          <a:bodyPr/>
+          <a:p>
+            <a:pPr/>
+            <a:endParaRPr/>
+          </a:p>
+        </p:txBody>
+      </p:sp>
+      <p:sp>
+        <p:nvSpPr>
+          <p:cNvPr id="25" name="Shape 26"/>
+          <p:cNvSpPr/>
+          <p:nvPr/>
+        </p:nvSpPr>
+        <p:spPr>
+          <a:xfrm>
+            <a:off x="5029200" y="2045970"/>
+            <a:ext cx="292608" cy="228600"/>
           </a:xfrm>
           <a:prstGeom prst="roundRect">
             <a:avLst>
-              <a:gd name="adj" fmla="val 26667"/>
+              <a:gd name="adj" fmla="val 12000"/>
             </a:avLst>
           </a:prstGeom>
           <a:solidFill>
-            <a:srgbClr val="D6E4F0"/>
-          </a:solidFill>
-          <a:ln w="9525">
-            <a:solidFill>
-              <a:srgbClr val="B0C4DE"/>
-            </a:solidFill>
-          </a:ln>
+            <a:srgbClr val="DDEAF6"/>
+          </a:solidFill>
+          <a:ln w="8890">
+            <a:solidFill>
+              <a:srgbClr val="5B9BD5"/>
+            </a:solidFill>
+            <a:prstDash val="solid"/>
+          </a:ln>
+        </p:spPr>
+        <p:txBody>
+          <a:bodyPr/>
+          <a:p>
+            <a:pPr/>
+            <a:endParaRPr/>
+          </a:p>
+        </p:txBody>
+      </p:sp>
+      <p:sp>
+        <p:nvSpPr>
+          <p:cNvPr id="26" name="Text 27"/>
+          <p:cNvSpPr/>
+          <p:nvPr/>
+        </p:nvSpPr>
+        <p:spPr>
+          <a:xfrm>
+            <a:off x="5029200" y="2045970"/>
+            <a:ext cx="292608" cy="228600"/>
+          </a:xfrm>
+          <a:prstGeom prst="rect">
+            <a:avLst/>
+          </a:prstGeom>
+          <a:noFill/>
+          <a:ln/>
         </p:spPr>
         <p:txBody>
           <a:bodyPr wrap="square" rtlCol="0" anchor="ctr"/>
-          <a:lstStyle/>
-          <a:p>
-            <a:pPr marL="0" indent="0">
-              <a:buNone/>
-            </a:pPr>
-            <a:endParaRPr lang="en-US" dirty="0"/>
-          </a:p>
-        </p:txBody>
-      </p:sp>
-      <p:sp>
-        <p:nvSpPr>
-          <p:cNvPr id="36" name="Text 35"/>
-          <p:cNvSpPr/>
-          <p:nvPr/>
-        </p:nvSpPr>
-        <p:spPr>
-          <a:xfrm>
-            <a:off x="5380292" y="2716113"/>
-            <a:ext cx="120837" cy="95250"/>
-          </a:xfrm>
-          <a:prstGeom prst="rect">
-            <a:avLst/>
-          </a:prstGeom>
-          <a:noFill/>
-          <a:ln/>
-        </p:spPr>
-        <p:txBody>
-          <a:bodyPr wrap="square" lIns="0" tIns="0" rIns="0" bIns="0" rtlCol="0" anchor="t"/>
           <a:lstStyle/>
           <a:p>
             <a:pPr marL="0" indent="0" algn="ctr">
               <a:buNone/>
             </a:pPr>
             <a:r>
-              <a:rPr lang="en-US" sz="700" dirty="0">
+              <a:rPr lang="en-US" sz="900" dirty="0">
                 <a:solidFill>
                   <a:srgbClr val="333333"/>
                 </a:solidFill>
-                <a:latin typeface="Arial" pitchFamily="34" charset="0"/>
-                <a:ea typeface="Arial" pitchFamily="34" charset="-122"/>
-                <a:cs typeface="Arial" pitchFamily="34" charset="-120"/>
+                <a:latin typeface="Times New Roman" pitchFamily="34" charset="0"/>
+                <a:ea typeface="Times New Roman" pitchFamily="34" charset="-122"/>
+                <a:cs typeface="Times New Roman" pitchFamily="34" charset="-120"/>
               </a:rPr>
               <a:t>FC</a:t>
             </a:r>
-            <a:endParaRPr lang="en-US" sz="700" dirty="0"/>
-          </a:p>
-        </p:txBody>
-      </p:sp>
-      <p:sp>
-        <p:nvSpPr>
-          <p:cNvPr id="37" name="Text 36"/>
-          <p:cNvSpPr/>
-          <p:nvPr/>
-        </p:nvSpPr>
-        <p:spPr>
-          <a:xfrm>
-            <a:off x="5308550" y="2884289"/>
-            <a:ext cx="264319" cy="190500"/>
+            <a:endParaRPr lang="en-US" sz="900" dirty="0"/>
+          </a:p>
+        </p:txBody>
+      </p:sp>
+      <p:sp>
+        <p:nvSpPr>
+          <p:cNvPr id="27" name="Shape 28"/>
+          <p:cNvSpPr/>
+          <p:nvPr/>
+        </p:nvSpPr>
+        <p:spPr>
+          <a:xfrm flipV="1">
+            <a:off x="4864608" y="2160270"/>
+            <a:ext cx="164592" cy="411480"/>
+          </a:xfrm>
+          <a:prstGeom prst="line">
+            <a:avLst/>
+          </a:prstGeom>
+          <a:noFill/>
+          <a:ln w="8890">
+            <a:solidFill>
+              <a:srgbClr val="666666"/>
+            </a:solidFill>
+            <a:prstDash val="solid"/>
+          </a:ln>
+        </p:spPr>
+        <p:txBody>
+          <a:bodyPr/>
+          <a:p>
+            <a:pPr/>
+            <a:endParaRPr/>
+          </a:p>
+        </p:txBody>
+      </p:sp>
+      <p:sp>
+        <p:nvSpPr>
+          <p:cNvPr id="28" name="Shape 29"/>
+          <p:cNvSpPr/>
+          <p:nvPr/>
+        </p:nvSpPr>
+        <p:spPr>
+          <a:xfrm>
+            <a:off x="5029200" y="2320290"/>
+            <a:ext cx="292608" cy="228600"/>
           </a:xfrm>
           <a:prstGeom prst="roundRect">
             <a:avLst>
-              <a:gd name="adj" fmla="val 26667"/>
+              <a:gd name="adj" fmla="val 12000"/>
             </a:avLst>
           </a:prstGeom>
           <a:solidFill>
-            <a:srgbClr val="D6E4F0"/>
-          </a:solidFill>
-          <a:ln w="9525">
-            <a:solidFill>
-              <a:srgbClr val="B0C4DE"/>
-            </a:solidFill>
-          </a:ln>
+            <a:srgbClr val="DDEAF6"/>
+          </a:solidFill>
+          <a:ln w="8890">
+            <a:solidFill>
+              <a:srgbClr val="5B9BD5"/>
+            </a:solidFill>
+            <a:prstDash val="solid"/>
+          </a:ln>
+        </p:spPr>
+        <p:txBody>
+          <a:bodyPr/>
+          <a:p>
+            <a:pPr/>
+            <a:endParaRPr/>
+          </a:p>
+        </p:txBody>
+      </p:sp>
+      <p:sp>
+        <p:nvSpPr>
+          <p:cNvPr id="29" name="Text 30"/>
+          <p:cNvSpPr/>
+          <p:nvPr/>
+        </p:nvSpPr>
+        <p:spPr>
+          <a:xfrm>
+            <a:off x="5029200" y="2320290"/>
+            <a:ext cx="292608" cy="228600"/>
+          </a:xfrm>
+          <a:prstGeom prst="rect">
+            <a:avLst/>
+          </a:prstGeom>
+          <a:noFill/>
+          <a:ln/>
         </p:spPr>
         <p:txBody>
           <a:bodyPr wrap="square" rtlCol="0" anchor="ctr"/>
-          <a:lstStyle/>
-          <a:p>
-            <a:pPr marL="0" indent="0">
-              <a:buNone/>
-            </a:pPr>
-            <a:endParaRPr lang="en-US" dirty="0"/>
-          </a:p>
-        </p:txBody>
-      </p:sp>
-      <p:sp>
-        <p:nvSpPr>
-          <p:cNvPr id="38" name="Text 37"/>
-          <p:cNvSpPr/>
-          <p:nvPr/>
-        </p:nvSpPr>
-        <p:spPr>
-          <a:xfrm>
-            <a:off x="5380292" y="2931914"/>
-            <a:ext cx="120837" cy="95250"/>
-          </a:xfrm>
-          <a:prstGeom prst="rect">
-            <a:avLst/>
-          </a:prstGeom>
-          <a:noFill/>
-          <a:ln/>
-        </p:spPr>
-        <p:txBody>
-          <a:bodyPr wrap="square" lIns="0" tIns="0" rIns="0" bIns="0" rtlCol="0" anchor="t"/>
           <a:lstStyle/>
           <a:p>
             <a:pPr marL="0" indent="0" algn="ctr">
               <a:buNone/>
             </a:pPr>
             <a:r>
-              <a:rPr lang="en-US" sz="700" dirty="0">
+              <a:rPr lang="en-US" sz="900" dirty="0">
                 <a:solidFill>
                   <a:srgbClr val="333333"/>
                 </a:solidFill>
-                <a:latin typeface="Arial" pitchFamily="34" charset="0"/>
-                <a:ea typeface="Arial" pitchFamily="34" charset="-122"/>
-                <a:cs typeface="Arial" pitchFamily="34" charset="-120"/>
+                <a:latin typeface="Times New Roman" pitchFamily="34" charset="0"/>
+                <a:ea typeface="Times New Roman" pitchFamily="34" charset="-122"/>
+                <a:cs typeface="Times New Roman" pitchFamily="34" charset="-120"/>
               </a:rPr>
               <a:t>FC</a:t>
             </a:r>
-            <a:endParaRPr lang="en-US" sz="700" dirty="0"/>
-          </a:p>
-        </p:txBody>
-      </p:sp>
-      <p:sp>
-        <p:nvSpPr>
-          <p:cNvPr id="39" name="Text 38"/>
-          <p:cNvSpPr/>
-          <p:nvPr/>
-        </p:nvSpPr>
-        <p:spPr>
-          <a:xfrm>
-            <a:off x="5572869" y="2643188"/>
-            <a:ext cx="63401" cy="25301"/>
-          </a:xfrm>
-          <a:prstGeom prst="rect">
-            <a:avLst/>
-          </a:prstGeom>
-          <a:solidFill>
-            <a:srgbClr val="333333"/>
-          </a:solidFill>
-          <a:ln/>
-        </p:spPr>
-        <p:txBody>
-          <a:bodyPr wrap="square" rtlCol="0" anchor="ctr"/>
-          <a:lstStyle/>
-          <a:p>
-            <a:pPr marL="0" indent="0">
-              <a:buNone/>
-            </a:pPr>
-            <a:endParaRPr lang="en-US" dirty="0"/>
-          </a:p>
-        </p:txBody>
-      </p:sp>
-      <p:sp>
-        <p:nvSpPr>
-          <p:cNvPr id="40" name="Text 39"/>
-          <p:cNvSpPr/>
-          <p:nvPr/>
-        </p:nvSpPr>
-        <p:spPr>
-          <a:xfrm>
-            <a:off x="5636270" y="2522488"/>
-            <a:ext cx="427434" cy="266700"/>
+            <a:endParaRPr lang="en-US" sz="900" dirty="0"/>
+          </a:p>
+        </p:txBody>
+      </p:sp>
+      <p:sp>
+        <p:nvSpPr>
+          <p:cNvPr id="30" name="Shape 31"/>
+          <p:cNvSpPr/>
+          <p:nvPr/>
+        </p:nvSpPr>
+        <p:spPr>
+          <a:xfrm flipV="1">
+            <a:off x="4864608" y="2434590"/>
+            <a:ext cx="164592" cy="137160"/>
+          </a:xfrm>
+          <a:prstGeom prst="line">
+            <a:avLst/>
+          </a:prstGeom>
+          <a:noFill/>
+          <a:ln w="8890">
+            <a:solidFill>
+              <a:srgbClr val="666666"/>
+            </a:solidFill>
+            <a:prstDash val="solid"/>
+          </a:ln>
+        </p:spPr>
+        <p:txBody>
+          <a:bodyPr/>
+          <a:p>
+            <a:pPr/>
+            <a:endParaRPr/>
+          </a:p>
+        </p:txBody>
+      </p:sp>
+      <p:sp>
+        <p:nvSpPr>
+          <p:cNvPr id="31" name="Shape 32"/>
+          <p:cNvSpPr/>
+          <p:nvPr/>
+        </p:nvSpPr>
+        <p:spPr>
+          <a:xfrm>
+            <a:off x="5029200" y="2594610"/>
+            <a:ext cx="292608" cy="228600"/>
           </a:xfrm>
           <a:prstGeom prst="roundRect">
             <a:avLst>
-              <a:gd name="adj" fmla="val 19048"/>
+              <a:gd name="adj" fmla="val 12000"/>
             </a:avLst>
           </a:prstGeom>
           <a:solidFill>
-            <a:srgbClr val="D6E4F0"/>
-          </a:solidFill>
-          <a:ln w="9525">
-            <a:solidFill>
-              <a:srgbClr val="B0C4DE"/>
-            </a:solidFill>
-          </a:ln>
+            <a:srgbClr val="DDEAF6"/>
+          </a:solidFill>
+          <a:ln w="8890">
+            <a:solidFill>
+              <a:srgbClr val="5B9BD5"/>
+            </a:solidFill>
+            <a:prstDash val="solid"/>
+          </a:ln>
+        </p:spPr>
+        <p:txBody>
+          <a:bodyPr/>
+          <a:p>
+            <a:pPr/>
+            <a:endParaRPr/>
+          </a:p>
+        </p:txBody>
+      </p:sp>
+      <p:sp>
+        <p:nvSpPr>
+          <p:cNvPr id="32" name="Text 33"/>
+          <p:cNvSpPr/>
+          <p:nvPr/>
+        </p:nvSpPr>
+        <p:spPr>
+          <a:xfrm>
+            <a:off x="5029200" y="2594610"/>
+            <a:ext cx="292608" cy="228600"/>
+          </a:xfrm>
+          <a:prstGeom prst="rect">
+            <a:avLst/>
+          </a:prstGeom>
+          <a:noFill/>
+          <a:ln/>
         </p:spPr>
         <p:txBody>
           <a:bodyPr wrap="square" rtlCol="0" anchor="ctr"/>
-          <a:lstStyle/>
-          <a:p>
-            <a:pPr marL="0" indent="0">
-              <a:buNone/>
-            </a:pPr>
-            <a:endParaRPr lang="en-US" dirty="0"/>
-          </a:p>
-        </p:txBody>
-      </p:sp>
-      <p:sp>
-        <p:nvSpPr>
-          <p:cNvPr id="41" name="Text 40"/>
-          <p:cNvSpPr/>
-          <p:nvPr/>
-        </p:nvSpPr>
-        <p:spPr>
-          <a:xfrm>
-            <a:off x="5706380" y="2608213"/>
-            <a:ext cx="287214" cy="95250"/>
-          </a:xfrm>
-          <a:prstGeom prst="rect">
-            <a:avLst/>
-          </a:prstGeom>
-          <a:noFill/>
-          <a:ln/>
-        </p:spPr>
-        <p:txBody>
-          <a:bodyPr wrap="square" lIns="0" tIns="0" rIns="0" bIns="0" rtlCol="0" anchor="t"/>
           <a:lstStyle/>
           <a:p>
             <a:pPr marL="0" indent="0" algn="ctr">
               <a:buNone/>
             </a:pPr>
             <a:r>
-              <a:rPr lang="en-US" sz="700" dirty="0">
+              <a:rPr lang="en-US" sz="900" dirty="0">
                 <a:solidFill>
                   <a:srgbClr val="333333"/>
                 </a:solidFill>
-                <a:latin typeface="Arial" pitchFamily="34" charset="0"/>
-                <a:ea typeface="Arial" pitchFamily="34" charset="-122"/>
-                <a:cs typeface="Arial" pitchFamily="34" charset="-120"/>
+                <a:latin typeface="Times New Roman" pitchFamily="34" charset="0"/>
+                <a:ea typeface="Times New Roman" pitchFamily="34" charset="-122"/>
+                <a:cs typeface="Times New Roman" pitchFamily="34" charset="-120"/>
               </a:rPr>
-              <a:t>Concat</a:t>
+              <a:t>FC</a:t>
             </a:r>
-            <a:endParaRPr lang="en-US" sz="700" dirty="0"/>
-          </a:p>
-        </p:txBody>
-      </p:sp>
-      <p:sp>
-        <p:nvSpPr>
-          <p:cNvPr id="42" name="Text 41"/>
-          <p:cNvSpPr/>
-          <p:nvPr/>
-        </p:nvSpPr>
-        <p:spPr>
-          <a:xfrm>
-            <a:off x="6063704" y="2643188"/>
-            <a:ext cx="63401" cy="25301"/>
-          </a:xfrm>
-          <a:prstGeom prst="rect">
-            <a:avLst/>
-          </a:prstGeom>
-          <a:solidFill>
-            <a:srgbClr val="333333"/>
-          </a:solidFill>
-          <a:ln/>
-        </p:spPr>
-        <p:txBody>
-          <a:bodyPr wrap="square" rtlCol="0" anchor="ctr"/>
-          <a:lstStyle/>
-          <a:p>
-            <a:pPr marL="0" indent="0">
-              <a:buNone/>
-            </a:pPr>
-            <a:endParaRPr lang="en-US" dirty="0"/>
-          </a:p>
-        </p:txBody>
-      </p:sp>
-      <p:sp>
-        <p:nvSpPr>
-          <p:cNvPr id="43" name="Text 42"/>
-          <p:cNvSpPr/>
-          <p:nvPr/>
-        </p:nvSpPr>
-        <p:spPr>
-          <a:xfrm>
-            <a:off x="6127105" y="2522488"/>
-            <a:ext cx="264319" cy="266700"/>
+            <a:endParaRPr lang="en-US" sz="900" dirty="0"/>
+          </a:p>
+        </p:txBody>
+      </p:sp>
+      <p:sp>
+        <p:nvSpPr>
+          <p:cNvPr id="33" name="Shape 34"/>
+          <p:cNvSpPr/>
+          <p:nvPr/>
+        </p:nvSpPr>
+        <p:spPr>
+          <a:xfrm>
+            <a:off x="4864608" y="2571750"/>
+            <a:ext cx="164592" cy="137160"/>
+          </a:xfrm>
+          <a:prstGeom prst="line">
+            <a:avLst/>
+          </a:prstGeom>
+          <a:noFill/>
+          <a:ln w="8890">
+            <a:solidFill>
+              <a:srgbClr val="666666"/>
+            </a:solidFill>
+            <a:prstDash val="solid"/>
+          </a:ln>
+        </p:spPr>
+        <p:txBody>
+          <a:bodyPr/>
+          <a:p>
+            <a:pPr/>
+            <a:endParaRPr/>
+          </a:p>
+        </p:txBody>
+      </p:sp>
+      <p:sp>
+        <p:nvSpPr>
+          <p:cNvPr id="34" name="Shape 35"/>
+          <p:cNvSpPr/>
+          <p:nvPr/>
+        </p:nvSpPr>
+        <p:spPr>
+          <a:xfrm>
+            <a:off x="5029200" y="2868930"/>
+            <a:ext cx="292608" cy="228600"/>
           </a:xfrm>
           <a:prstGeom prst="roundRect">
             <a:avLst>
-              <a:gd name="adj" fmla="val 19219"/>
+              <a:gd name="adj" fmla="val 12000"/>
             </a:avLst>
           </a:prstGeom>
           <a:solidFill>
-            <a:srgbClr val="D6E4F0"/>
-          </a:solidFill>
-          <a:ln w="9525">
-            <a:solidFill>
-              <a:srgbClr val="B0C4DE"/>
-            </a:solidFill>
-          </a:ln>
+            <a:srgbClr val="DDEAF6"/>
+          </a:solidFill>
+          <a:ln w="8890">
+            <a:solidFill>
+              <a:srgbClr val="5B9BD5"/>
+            </a:solidFill>
+            <a:prstDash val="solid"/>
+          </a:ln>
+        </p:spPr>
+        <p:txBody>
+          <a:bodyPr/>
+          <a:p>
+            <a:pPr/>
+            <a:endParaRPr/>
+          </a:p>
+        </p:txBody>
+      </p:sp>
+      <p:sp>
+        <p:nvSpPr>
+          <p:cNvPr id="35" name="Text 36"/>
+          <p:cNvSpPr/>
+          <p:nvPr/>
+        </p:nvSpPr>
+        <p:spPr>
+          <a:xfrm>
+            <a:off x="5029200" y="2868930"/>
+            <a:ext cx="292608" cy="228600"/>
+          </a:xfrm>
+          <a:prstGeom prst="rect">
+            <a:avLst/>
+          </a:prstGeom>
+          <a:noFill/>
+          <a:ln/>
         </p:spPr>
         <p:txBody>
           <a:bodyPr wrap="square" rtlCol="0" anchor="ctr"/>
-          <a:lstStyle/>
-          <a:p>
-            <a:pPr marL="0" indent="0">
-              <a:buNone/>
-            </a:pPr>
-            <a:endParaRPr lang="en-US" dirty="0"/>
-          </a:p>
-        </p:txBody>
-      </p:sp>
-      <p:sp>
-        <p:nvSpPr>
-          <p:cNvPr id="44" name="Text 43"/>
-          <p:cNvSpPr/>
-          <p:nvPr/>
-        </p:nvSpPr>
-        <p:spPr>
-          <a:xfrm>
-            <a:off x="6198846" y="2608213"/>
-            <a:ext cx="120837" cy="95250"/>
-          </a:xfrm>
-          <a:prstGeom prst="rect">
-            <a:avLst/>
-          </a:prstGeom>
-          <a:noFill/>
-          <a:ln/>
-        </p:spPr>
-        <p:txBody>
-          <a:bodyPr wrap="square" lIns="0" tIns="0" rIns="0" bIns="0" rtlCol="0" anchor="t"/>
           <a:lstStyle/>
           <a:p>
             <a:pPr marL="0" indent="0" algn="ctr">
               <a:buNone/>
             </a:pPr>
             <a:r>
-              <a:rPr lang="en-US" sz="700" dirty="0">
+              <a:rPr lang="en-US" sz="900" dirty="0">
                 <a:solidFill>
                   <a:srgbClr val="333333"/>
                 </a:solidFill>
-                <a:latin typeface="Arial" pitchFamily="34" charset="0"/>
-                <a:ea typeface="Arial" pitchFamily="34" charset="-122"/>
-                <a:cs typeface="Arial" pitchFamily="34" charset="-120"/>
+                <a:latin typeface="Times New Roman" pitchFamily="34" charset="0"/>
+                <a:ea typeface="Times New Roman" pitchFamily="34" charset="-122"/>
+                <a:cs typeface="Times New Roman" pitchFamily="34" charset="-120"/>
               </a:rPr>
               <a:t>FC</a:t>
             </a:r>
-            <a:endParaRPr lang="en-US" sz="700" dirty="0"/>
-          </a:p>
-        </p:txBody>
-      </p:sp>
-      <p:sp>
-        <p:nvSpPr>
-          <p:cNvPr id="45" name="Text 44"/>
-          <p:cNvSpPr/>
-          <p:nvPr/>
-        </p:nvSpPr>
-        <p:spPr>
-          <a:xfrm>
-            <a:off x="6391424" y="2643188"/>
-            <a:ext cx="63401" cy="25301"/>
-          </a:xfrm>
-          <a:prstGeom prst="rect">
-            <a:avLst/>
-          </a:prstGeom>
-          <a:solidFill>
-            <a:srgbClr val="333333"/>
-          </a:solidFill>
-          <a:ln/>
-        </p:spPr>
-        <p:txBody>
-          <a:bodyPr wrap="square" rtlCol="0" anchor="ctr"/>
-          <a:lstStyle/>
-          <a:p>
-            <a:pPr marL="0" indent="0">
-              <a:buNone/>
-            </a:pPr>
-            <a:endParaRPr lang="en-US" dirty="0"/>
-          </a:p>
-        </p:txBody>
-      </p:sp>
-      <p:sp>
-        <p:nvSpPr>
-          <p:cNvPr id="46" name="Text 45"/>
-          <p:cNvSpPr/>
-          <p:nvPr/>
-        </p:nvSpPr>
-        <p:spPr>
-          <a:xfrm>
-            <a:off x="6454825" y="2522488"/>
-            <a:ext cx="467023" cy="266700"/>
+            <a:endParaRPr lang="en-US" sz="900" dirty="0"/>
+          </a:p>
+        </p:txBody>
+      </p:sp>
+      <p:sp>
+        <p:nvSpPr>
+          <p:cNvPr id="36" name="Shape 37"/>
+          <p:cNvSpPr/>
+          <p:nvPr/>
+        </p:nvSpPr>
+        <p:spPr>
+          <a:xfrm>
+            <a:off x="4864608" y="2571750"/>
+            <a:ext cx="164592" cy="411480"/>
+          </a:xfrm>
+          <a:prstGeom prst="line">
+            <a:avLst/>
+          </a:prstGeom>
+          <a:noFill/>
+          <a:ln w="8890">
+            <a:solidFill>
+              <a:srgbClr val="666666"/>
+            </a:solidFill>
+            <a:prstDash val="solid"/>
+          </a:ln>
+        </p:spPr>
+        <p:txBody>
+          <a:bodyPr/>
+          <a:p>
+            <a:pPr/>
+            <a:endParaRPr/>
+          </a:p>
+        </p:txBody>
+      </p:sp>
+      <p:sp>
+        <p:nvSpPr>
+          <p:cNvPr id="37" name="Shape 38"/>
+          <p:cNvSpPr/>
+          <p:nvPr/>
+        </p:nvSpPr>
+        <p:spPr>
+          <a:xfrm>
+            <a:off x="5321808" y="2160270"/>
+            <a:ext cx="164592" cy="411480"/>
+          </a:xfrm>
+          <a:prstGeom prst="line">
+            <a:avLst/>
+          </a:prstGeom>
+          <a:noFill/>
+          <a:ln w="8890">
+            <a:solidFill>
+              <a:srgbClr val="666666"/>
+            </a:solidFill>
+            <a:prstDash val="solid"/>
+          </a:ln>
+        </p:spPr>
+        <p:txBody>
+          <a:bodyPr/>
+          <a:p>
+            <a:pPr/>
+            <a:endParaRPr/>
+          </a:p>
+        </p:txBody>
+      </p:sp>
+      <p:sp>
+        <p:nvSpPr>
+          <p:cNvPr id="38" name="Shape 39"/>
+          <p:cNvSpPr/>
+          <p:nvPr/>
+        </p:nvSpPr>
+        <p:spPr>
+          <a:xfrm>
+            <a:off x="5321808" y="2434590"/>
+            <a:ext cx="164592" cy="137160"/>
+          </a:xfrm>
+          <a:prstGeom prst="line">
+            <a:avLst/>
+          </a:prstGeom>
+          <a:noFill/>
+          <a:ln w="8890">
+            <a:solidFill>
+              <a:srgbClr val="666666"/>
+            </a:solidFill>
+            <a:prstDash val="solid"/>
+          </a:ln>
+        </p:spPr>
+        <p:txBody>
+          <a:bodyPr/>
+          <a:p>
+            <a:pPr/>
+            <a:endParaRPr/>
+          </a:p>
+        </p:txBody>
+      </p:sp>
+      <p:sp>
+        <p:nvSpPr>
+          <p:cNvPr id="39" name="Shape 40"/>
+          <p:cNvSpPr/>
+          <p:nvPr/>
+        </p:nvSpPr>
+        <p:spPr>
+          <a:xfrm flipV="1">
+            <a:off x="5321808" y="2571750"/>
+            <a:ext cx="164592" cy="137160"/>
+          </a:xfrm>
+          <a:prstGeom prst="line">
+            <a:avLst/>
+          </a:prstGeom>
+          <a:noFill/>
+          <a:ln w="8890">
+            <a:solidFill>
+              <a:srgbClr val="666666"/>
+            </a:solidFill>
+            <a:prstDash val="solid"/>
+          </a:ln>
+        </p:spPr>
+        <p:txBody>
+          <a:bodyPr/>
+          <a:p>
+            <a:pPr/>
+            <a:endParaRPr/>
+          </a:p>
+        </p:txBody>
+      </p:sp>
+      <p:sp>
+        <p:nvSpPr>
+          <p:cNvPr id="40" name="Shape 41"/>
+          <p:cNvSpPr/>
+          <p:nvPr/>
+        </p:nvSpPr>
+        <p:spPr>
+          <a:xfrm flipV="1">
+            <a:off x="5321808" y="2571750"/>
+            <a:ext cx="164592" cy="411480"/>
+          </a:xfrm>
+          <a:prstGeom prst="line">
+            <a:avLst/>
+          </a:prstGeom>
+          <a:noFill/>
+          <a:ln w="8890">
+            <a:solidFill>
+              <a:srgbClr val="666666"/>
+            </a:solidFill>
+            <a:prstDash val="solid"/>
+          </a:ln>
+        </p:spPr>
+        <p:txBody>
+          <a:bodyPr/>
+          <a:p>
+            <a:pPr/>
+            <a:endParaRPr/>
+          </a:p>
+        </p:txBody>
+      </p:sp>
+      <p:sp>
+        <p:nvSpPr>
+          <p:cNvPr id="41" name="Shape 42"/>
+          <p:cNvSpPr/>
+          <p:nvPr/>
+        </p:nvSpPr>
+        <p:spPr>
+          <a:xfrm>
+            <a:off x="5486400" y="2571750"/>
+            <a:ext cx="128016" cy="914"/>
+          </a:xfrm>
+          <a:prstGeom prst="line">
+            <a:avLst/>
+          </a:prstGeom>
+          <a:noFill/>
+          <a:ln w="8890">
+            <a:solidFill>
+              <a:srgbClr val="666666"/>
+            </a:solidFill>
+            <a:prstDash val="solid"/>
+            <a:tailEnd type="triangle"/>
+          </a:ln>
+        </p:spPr>
+        <p:txBody>
+          <a:bodyPr/>
+          <a:p>
+            <a:pPr/>
+            <a:endParaRPr/>
+          </a:p>
+        </p:txBody>
+      </p:sp>
+      <p:sp>
+        <p:nvSpPr>
+          <p:cNvPr id="42" name="Shape 43"/>
+          <p:cNvSpPr/>
+          <p:nvPr/>
+        </p:nvSpPr>
+        <p:spPr>
+          <a:xfrm>
+            <a:off x="5614416" y="2361438"/>
+            <a:ext cx="548640" cy="420624"/>
           </a:xfrm>
           <a:prstGeom prst="roundRect">
             <a:avLst>
-              <a:gd name="adj" fmla="val 19048"/>
+              <a:gd name="adj" fmla="val 8696"/>
             </a:avLst>
           </a:prstGeom>
           <a:solidFill>
-            <a:srgbClr val="D6E4F0"/>
-          </a:solidFill>
-          <a:ln w="9525">
-            <a:solidFill>
-              <a:srgbClr val="B0C4DE"/>
-            </a:solidFill>
-          </a:ln>
+            <a:srgbClr val="DDEAF6"/>
+          </a:solidFill>
+          <a:ln w="10160">
+            <a:solidFill>
+              <a:srgbClr val="5B9BD5"/>
+            </a:solidFill>
+            <a:prstDash val="solid"/>
+          </a:ln>
+        </p:spPr>
+        <p:txBody>
+          <a:bodyPr/>
+          <a:p>
+            <a:pPr/>
+            <a:endParaRPr/>
+          </a:p>
+        </p:txBody>
+      </p:sp>
+      <p:sp>
+        <p:nvSpPr>
+          <p:cNvPr id="43" name="Text 44"/>
+          <p:cNvSpPr/>
+          <p:nvPr/>
+        </p:nvSpPr>
+        <p:spPr>
+          <a:xfrm>
+            <a:off x="5614416" y="2361438"/>
+            <a:ext cx="548640" cy="420624"/>
+          </a:xfrm>
+          <a:prstGeom prst="rect">
+            <a:avLst/>
+          </a:prstGeom>
+          <a:noFill/>
+          <a:ln/>
         </p:spPr>
         <p:txBody>
           <a:bodyPr wrap="square" rtlCol="0" anchor="ctr"/>
-          <a:lstStyle/>
-          <a:p>
-            <a:pPr marL="0" indent="0">
-              <a:buNone/>
-            </a:pPr>
-            <a:endParaRPr lang="en-US" dirty="0"/>
-          </a:p>
-        </p:txBody>
-      </p:sp>
-      <p:sp>
-        <p:nvSpPr>
-          <p:cNvPr id="47" name="Text 46"/>
-          <p:cNvSpPr/>
-          <p:nvPr/>
-        </p:nvSpPr>
-        <p:spPr>
-          <a:xfrm>
-            <a:off x="6524539" y="2608213"/>
-            <a:ext cx="327595" cy="95250"/>
-          </a:xfrm>
-          <a:prstGeom prst="rect">
-            <a:avLst/>
-          </a:prstGeom>
-          <a:noFill/>
-          <a:ln/>
-        </p:spPr>
-        <p:txBody>
-          <a:bodyPr wrap="square" lIns="0" tIns="0" rIns="0" bIns="0" rtlCol="0" anchor="t"/>
           <a:lstStyle/>
           <a:p>
             <a:pPr marL="0" indent="0" algn="ctr">
               <a:buNone/>
             </a:pPr>
             <a:r>
-              <a:rPr lang="en-US" sz="700" dirty="0">
+              <a:rPr lang="en-US" sz="900" dirty="0">
                 <a:solidFill>
                   <a:srgbClr val="333333"/>
                 </a:solidFill>
-                <a:latin typeface="Arial" pitchFamily="34" charset="0"/>
-                <a:ea typeface="Arial" pitchFamily="34" charset="-122"/>
-                <a:cs typeface="Arial" pitchFamily="34" charset="-120"/>
+                <a:latin typeface="Times New Roman" pitchFamily="34" charset="0"/>
+                <a:ea typeface="Times New Roman" pitchFamily="34" charset="-122"/>
+                <a:cs typeface="Times New Roman" pitchFamily="34" charset="-120"/>
+              </a:rPr>
+              <a:t>Concat</a:t>
+            </a:r>
+            <a:endParaRPr lang="en-US" sz="900" dirty="0"/>
+          </a:p>
+        </p:txBody>
+      </p:sp>
+      <p:sp>
+        <p:nvSpPr>
+          <p:cNvPr id="44" name="Shape 45"/>
+          <p:cNvSpPr/>
+          <p:nvPr/>
+        </p:nvSpPr>
+        <p:spPr>
+          <a:xfrm>
+            <a:off x="6163056" y="2571750"/>
+            <a:ext cx="128016" cy="914"/>
+          </a:xfrm>
+          <a:prstGeom prst="line">
+            <a:avLst/>
+          </a:prstGeom>
+          <a:noFill/>
+          <a:ln w="8890">
+            <a:solidFill>
+              <a:srgbClr val="666666"/>
+            </a:solidFill>
+            <a:prstDash val="solid"/>
+            <a:tailEnd type="triangle"/>
+          </a:ln>
+        </p:spPr>
+        <p:txBody>
+          <a:bodyPr/>
+          <a:p>
+            <a:pPr/>
+            <a:endParaRPr/>
+          </a:p>
+        </p:txBody>
+      </p:sp>
+      <p:sp>
+        <p:nvSpPr>
+          <p:cNvPr id="45" name="Shape 46"/>
+          <p:cNvSpPr/>
+          <p:nvPr/>
+        </p:nvSpPr>
+        <p:spPr>
+          <a:xfrm>
+            <a:off x="6291072" y="2361438"/>
+            <a:ext cx="320040" cy="420624"/>
+          </a:xfrm>
+          <a:prstGeom prst="roundRect">
+            <a:avLst>
+              <a:gd name="adj" fmla="val 11429"/>
+            </a:avLst>
+          </a:prstGeom>
+          <a:solidFill>
+            <a:srgbClr val="DDEAF6"/>
+          </a:solidFill>
+          <a:ln w="10160">
+            <a:solidFill>
+              <a:srgbClr val="5B9BD5"/>
+            </a:solidFill>
+            <a:prstDash val="solid"/>
+          </a:ln>
+        </p:spPr>
+        <p:txBody>
+          <a:bodyPr/>
+          <a:p>
+            <a:pPr/>
+            <a:endParaRPr/>
+          </a:p>
+        </p:txBody>
+      </p:sp>
+      <p:sp>
+        <p:nvSpPr>
+          <p:cNvPr id="46" name="Text 47"/>
+          <p:cNvSpPr/>
+          <p:nvPr/>
+        </p:nvSpPr>
+        <p:spPr>
+          <a:xfrm>
+            <a:off x="6291072" y="2361438"/>
+            <a:ext cx="320040" cy="420624"/>
+          </a:xfrm>
+          <a:prstGeom prst="rect">
+            <a:avLst/>
+          </a:prstGeom>
+          <a:noFill/>
+          <a:ln/>
+        </p:spPr>
+        <p:txBody>
+          <a:bodyPr wrap="square" rtlCol="0" anchor="ctr"/>
+          <a:lstStyle/>
+          <a:p>
+            <a:pPr marL="0" indent="0" algn="ctr">
+              <a:buNone/>
+            </a:pPr>
+            <a:r>
+              <a:rPr lang="en-US" sz="900" dirty="0">
+                <a:solidFill>
+                  <a:srgbClr val="333333"/>
+                </a:solidFill>
+                <a:latin typeface="Times New Roman" pitchFamily="34" charset="0"/>
+                <a:ea typeface="Times New Roman" pitchFamily="34" charset="-122"/>
+                <a:cs typeface="Times New Roman" pitchFamily="34" charset="-120"/>
+              </a:rPr>
+              <a:t>FC</a:t>
+            </a:r>
+            <a:endParaRPr lang="en-US" sz="900" dirty="0"/>
+          </a:p>
+        </p:txBody>
+      </p:sp>
+      <p:sp>
+        <p:nvSpPr>
+          <p:cNvPr id="47" name="Shape 48"/>
+          <p:cNvSpPr/>
+          <p:nvPr/>
+        </p:nvSpPr>
+        <p:spPr>
+          <a:xfrm>
+            <a:off x="6611112" y="2571750"/>
+            <a:ext cx="128016" cy="914"/>
+          </a:xfrm>
+          <a:prstGeom prst="line">
+            <a:avLst/>
+          </a:prstGeom>
+          <a:noFill/>
+          <a:ln w="8890">
+            <a:solidFill>
+              <a:srgbClr val="666666"/>
+            </a:solidFill>
+            <a:prstDash val="solid"/>
+            <a:tailEnd type="triangle"/>
+          </a:ln>
+        </p:spPr>
+        <p:txBody>
+          <a:bodyPr/>
+          <a:p>
+            <a:pPr/>
+            <a:endParaRPr/>
+          </a:p>
+        </p:txBody>
+      </p:sp>
+      <p:sp>
+        <p:nvSpPr>
+          <p:cNvPr id="48" name="Shape 49"/>
+          <p:cNvSpPr/>
+          <p:nvPr/>
+        </p:nvSpPr>
+        <p:spPr>
+          <a:xfrm>
+            <a:off x="6739128" y="2361438"/>
+            <a:ext cx="548640" cy="420624"/>
+          </a:xfrm>
+          <a:prstGeom prst="roundRect">
+            <a:avLst>
+              <a:gd name="adj" fmla="val 8696"/>
+            </a:avLst>
+          </a:prstGeom>
+          <a:solidFill>
+            <a:srgbClr val="DDEAF6"/>
+          </a:solidFill>
+          <a:ln w="10160">
+            <a:solidFill>
+              <a:srgbClr val="5B9BD5"/>
+            </a:solidFill>
+            <a:prstDash val="solid"/>
+          </a:ln>
+        </p:spPr>
+        <p:txBody>
+          <a:bodyPr/>
+          <a:p>
+            <a:pPr/>
+            <a:endParaRPr/>
+          </a:p>
+        </p:txBody>
+      </p:sp>
+      <p:sp>
+        <p:nvSpPr>
+          <p:cNvPr id="49" name="Text 50"/>
+          <p:cNvSpPr/>
+          <p:nvPr/>
+        </p:nvSpPr>
+        <p:spPr>
+          <a:xfrm>
+            <a:off x="6739128" y="2361438"/>
+            <a:ext cx="548640" cy="420624"/>
+          </a:xfrm>
+          <a:prstGeom prst="rect">
+            <a:avLst/>
+          </a:prstGeom>
+          <a:noFill/>
+          <a:ln/>
+        </p:spPr>
+        <p:txBody>
+          <a:bodyPr wrap="square" rtlCol="0" anchor="ctr"/>
+          <a:lstStyle/>
+          <a:p>
+            <a:pPr marL="0" indent="0" algn="ctr">
+              <a:buNone/>
+            </a:pPr>
+            <a:r>
+              <a:rPr lang="en-US" sz="900" dirty="0">
+                <a:solidFill>
+                  <a:srgbClr val="333333"/>
+                </a:solidFill>
+                <a:latin typeface="Times New Roman" pitchFamily="34" charset="0"/>
+                <a:ea typeface="Times New Roman" pitchFamily="34" charset="-122"/>
+                <a:cs typeface="Times New Roman" pitchFamily="34" charset="-120"/>
               </a:rPr>
               <a:t>Sigmoid</a:t>
             </a:r>
-            <a:endParaRPr lang="en-US" sz="700" dirty="0"/>
-          </a:p>
-        </p:txBody>
-      </p:sp>
-      <p:sp>
-        <p:nvSpPr>
-          <p:cNvPr id="48" name="Text 47"/>
-          <p:cNvSpPr/>
-          <p:nvPr/>
-        </p:nvSpPr>
-        <p:spPr>
-          <a:xfrm>
-            <a:off x="6921847" y="2559100"/>
-            <a:ext cx="76200" cy="25301"/>
+            <a:endParaRPr lang="en-US" sz="900" dirty="0"/>
+          </a:p>
+        </p:txBody>
+      </p:sp>
+      <p:sp>
+        <p:nvSpPr>
+          <p:cNvPr id="50" name="Shape 51"/>
+          <p:cNvSpPr/>
+          <p:nvPr/>
+        </p:nvSpPr>
+        <p:spPr>
+          <a:xfrm>
+            <a:off x="7287768" y="2571750"/>
+            <a:ext cx="128016" cy="914"/>
+          </a:xfrm>
+          <a:prstGeom prst="line">
+            <a:avLst/>
+          </a:prstGeom>
+          <a:noFill/>
+          <a:ln w="8890">
+            <a:solidFill>
+              <a:srgbClr val="666666"/>
+            </a:solidFill>
+            <a:prstDash val="solid"/>
+          </a:ln>
+        </p:spPr>
+        <p:txBody>
+          <a:bodyPr/>
+          <a:p>
+            <a:pPr/>
+            <a:endParaRPr/>
+          </a:p>
+        </p:txBody>
+      </p:sp>
+      <p:sp>
+        <p:nvSpPr>
+          <p:cNvPr id="51" name="Shape 52"/>
+          <p:cNvSpPr/>
+          <p:nvPr/>
+        </p:nvSpPr>
+        <p:spPr>
+          <a:xfrm>
+            <a:off x="7415784" y="2443734"/>
+            <a:ext cx="256032" cy="256032"/>
+          </a:xfrm>
+          <a:prstGeom prst="ellipse">
+            <a:avLst/>
+          </a:prstGeom>
+          <a:solidFill>
+            <a:srgbClr val="FFFFFF"/>
+          </a:solidFill>
+          <a:ln w="10160">
+            <a:solidFill>
+              <a:srgbClr val="999999"/>
+            </a:solidFill>
+            <a:prstDash val="solid"/>
+          </a:ln>
+        </p:spPr>
+        <p:txBody>
+          <a:bodyPr/>
+          <a:p>
+            <a:pPr/>
+            <a:endParaRPr/>
+          </a:p>
+        </p:txBody>
+      </p:sp>
+      <p:sp>
+        <p:nvSpPr>
+          <p:cNvPr id="52" name="Text 53"/>
+          <p:cNvSpPr/>
+          <p:nvPr/>
+        </p:nvSpPr>
+        <p:spPr>
+          <a:xfrm>
+            <a:off x="7415784" y="2443734"/>
+            <a:ext cx="256032" cy="256032"/>
           </a:xfrm>
           <a:prstGeom prst="rect">
             <a:avLst/>
           </a:prstGeom>
-          <a:solidFill>
-            <a:srgbClr val="333333"/>
-          </a:solidFill>
+          <a:noFill/>
           <a:ln/>
         </p:spPr>
         <p:txBody>
           <a:bodyPr wrap="square" rtlCol="0" anchor="ctr"/>
           <a:lstStyle/>
           <a:p>
-            <a:pPr marL="0" indent="0">
-              <a:buNone/>
-            </a:pPr>
-            <a:endParaRPr lang="en-US" dirty="0"/>
-          </a:p>
-        </p:txBody>
-      </p:sp>
-      <p:sp>
-        <p:nvSpPr>
-          <p:cNvPr id="49" name="Text 48"/>
-          <p:cNvSpPr/>
-          <p:nvPr/>
-        </p:nvSpPr>
-        <p:spPr>
-          <a:xfrm>
-            <a:off x="6998047" y="2412950"/>
-            <a:ext cx="317450" cy="317450"/>
-          </a:xfrm>
-          <a:prstGeom prst="roundRect">
-            <a:avLst>
-              <a:gd name="adj" fmla="val 288045"/>
-            </a:avLst>
-          </a:prstGeom>
-          <a:solidFill>
-            <a:srgbClr val="FFFFFF"/>
-          </a:solidFill>
-          <a:ln w="19050">
-            <a:solidFill>
-              <a:srgbClr val="333333"/>
-            </a:solidFill>
-          </a:ln>
-        </p:spPr>
-        <p:txBody>
-          <a:bodyPr wrap="square" rtlCol="0" anchor="ctr"/>
-          <a:lstStyle/>
-          <a:p>
-            <a:pPr marL="0" indent="0">
-              <a:buNone/>
-            </a:pPr>
-            <a:endParaRPr lang="en-US" dirty="0"/>
-          </a:p>
-        </p:txBody>
-      </p:sp>
-      <p:sp>
-        <p:nvSpPr>
-          <p:cNvPr id="50" name="Text 49"/>
-          <p:cNvSpPr/>
-          <p:nvPr/>
-        </p:nvSpPr>
-        <p:spPr>
-          <a:xfrm>
-            <a:off x="7117854" y="2495401"/>
-            <a:ext cx="79242" cy="152400"/>
-          </a:xfrm>
-          <a:prstGeom prst="rect">
-            <a:avLst/>
-          </a:prstGeom>
-          <a:noFill/>
-          <a:ln/>
-        </p:spPr>
-        <p:txBody>
-          <a:bodyPr wrap="square" lIns="0" tIns="0" rIns="0" bIns="0" rtlCol="0" anchor="t"/>
-          <a:lstStyle/>
-          <a:p>
-            <a:pPr marL="0" indent="0" algn="l">
+            <a:pPr marL="0" indent="0" algn="ctr">
               <a:buNone/>
             </a:pPr>
             <a:r>
-              <a:rPr lang="en-US" sz="1100" b="1" dirty="0">
+              <a:rPr lang="en-US" sz="900" b="1" dirty="0">
                 <a:solidFill>
                   <a:srgbClr val="333333"/>
                 </a:solidFill>
-                <a:latin typeface="Arial" pitchFamily="34" charset="0"/>
-                <a:ea typeface="Arial" pitchFamily="34" charset="-122"/>
-                <a:cs typeface="Arial" pitchFamily="34" charset="-120"/>
+                <a:latin typeface="Times New Roman" pitchFamily="34" charset="0"/>
+                <a:ea typeface="Times New Roman" pitchFamily="34" charset="-122"/>
+                <a:cs typeface="Times New Roman" pitchFamily="34" charset="-120"/>
               </a:rPr>
-              <a:t>x</a:t>
+              <a:t>×</a:t>
             </a:r>
-            <a:endParaRPr lang="en-US" sz="1100" dirty="0"/>
-          </a:p>
-        </p:txBody>
-      </p:sp>
-      <p:sp>
-        <p:nvSpPr>
-          <p:cNvPr id="51" name="Text 50"/>
-          <p:cNvSpPr/>
-          <p:nvPr/>
-        </p:nvSpPr>
-        <p:spPr>
-          <a:xfrm>
-            <a:off x="7315498" y="2559100"/>
-            <a:ext cx="126950" cy="25301"/>
+            <a:endParaRPr lang="en-US" sz="900" dirty="0"/>
+          </a:p>
+        </p:txBody>
+      </p:sp>
+      <p:sp>
+        <p:nvSpPr>
+          <p:cNvPr id="53" name="Shape 54"/>
+          <p:cNvSpPr/>
+          <p:nvPr/>
+        </p:nvSpPr>
+        <p:spPr>
+          <a:xfrm>
+            <a:off x="7671816" y="2571750"/>
+            <a:ext cx="128016" cy="914"/>
+          </a:xfrm>
+          <a:prstGeom prst="line">
+            <a:avLst/>
+          </a:prstGeom>
+          <a:noFill/>
+          <a:ln w="8890">
+            <a:solidFill>
+              <a:srgbClr val="666666"/>
+            </a:solidFill>
+            <a:prstDash val="solid"/>
+            <a:tailEnd type="triangle"/>
+          </a:ln>
+        </p:spPr>
+        <p:txBody>
+          <a:bodyPr/>
+          <a:p>
+            <a:pPr/>
+            <a:endParaRPr/>
+          </a:p>
+        </p:txBody>
+      </p:sp>
+      <p:sp>
+        <p:nvSpPr>
+          <p:cNvPr id="54" name="Text 55"/>
+          <p:cNvSpPr/>
+          <p:nvPr/>
+        </p:nvSpPr>
+        <p:spPr>
+          <a:xfrm>
+            <a:off x="7799832" y="2480310"/>
+            <a:ext cx="411480" cy="182880"/>
           </a:xfrm>
           <a:prstGeom prst="rect">
             <a:avLst/>
           </a:prstGeom>
-          <a:solidFill>
-            <a:srgbClr val="333333"/>
-          </a:solidFill>
+          <a:noFill/>
           <a:ln/>
         </p:spPr>
         <p:txBody>
           <a:bodyPr wrap="square" rtlCol="0" anchor="ctr"/>
           <a:lstStyle/>
           <a:p>
-            <a:pPr marL="0" indent="0">
-              <a:buNone/>
-            </a:pPr>
-            <a:endParaRPr lang="en-US" dirty="0"/>
-          </a:p>
-        </p:txBody>
-      </p:sp>
-      <p:sp>
-        <p:nvSpPr>
-          <p:cNvPr id="52" name="Text 51"/>
-          <p:cNvSpPr/>
-          <p:nvPr/>
-        </p:nvSpPr>
-        <p:spPr>
-          <a:xfrm>
-            <a:off x="7480548" y="2524125"/>
-            <a:ext cx="272186" cy="95250"/>
-          </a:xfrm>
-          <a:prstGeom prst="rect">
-            <a:avLst/>
-          </a:prstGeom>
-          <a:noFill/>
-          <a:ln/>
-        </p:spPr>
-        <p:txBody>
-          <a:bodyPr wrap="square" lIns="0" tIns="0" rIns="0" bIns="0" rtlCol="0" anchor="t"/>
-          <a:lstStyle/>
-          <a:p>
-            <a:pPr marL="0" indent="0" algn="l">
+            <a:pPr marL="0" indent="0" algn="ctr">
               <a:buNone/>
             </a:pPr>
             <a:r>
-              <a:rPr lang="en-US" sz="700" i="1" dirty="0">
+              <a:rPr lang="en-US" sz="900" dirty="0">
                 <a:solidFill>
-                  <a:srgbClr val="666666"/>
+                  <a:srgbClr val="999999"/>
                 </a:solidFill>
-                <a:latin typeface="Arial" pitchFamily="34" charset="0"/>
-                <a:ea typeface="Arial" pitchFamily="34" charset="-122"/>
-                <a:cs typeface="Arial" pitchFamily="34" charset="-120"/>
+                <a:latin typeface="Times New Roman" pitchFamily="34" charset="0"/>
+                <a:ea typeface="Times New Roman" pitchFamily="34" charset="-122"/>
+                <a:cs typeface="Times New Roman" pitchFamily="34" charset="-120"/>
               </a:rPr>
               <a:t>Output</a:t>
             </a:r>
-            <a:endParaRPr lang="en-US" sz="700" dirty="0"/>
+            <a:endParaRPr lang="en-US" sz="900" dirty="0"/>
           </a:p>
         </p:txBody>
       </p:sp>
